--- a/src/Resident_Report_Template.pptx
+++ b/src/Resident_Report_Template.pptx
@@ -5,19 +5,16 @@
     <p:sldMasterId id="2147483684" r:id="rId4"/>
   </p:sldMasterIdLst>
   <p:notesMasterIdLst>
-    <p:notesMasterId r:id="rId12"/>
+    <p:notesMasterId r:id="rId9"/>
   </p:notesMasterIdLst>
   <p:handoutMasterIdLst>
-    <p:handoutMasterId r:id="rId13"/>
+    <p:handoutMasterId r:id="rId10"/>
   </p:handoutMasterIdLst>
   <p:sldIdLst>
     <p:sldId id="257" r:id="rId5"/>
     <p:sldId id="273" r:id="rId6"/>
     <p:sldId id="269" r:id="rId7"/>
     <p:sldId id="263" r:id="rId8"/>
-    <p:sldId id="275" r:id="rId9"/>
-    <p:sldId id="274" r:id="rId10"/>
-    <p:sldId id="267" r:id="rId11"/>
   </p:sldIdLst>
   <p:sldSz cx="7772400" cy="10058400"/>
   <p:notesSz cx="6858000" cy="9144000"/>
@@ -130,328 +127,33 @@
 <file path=ppt/revisionInfo.xml><?xml version="1.0" encoding="utf-8"?>
 <p1510:revInfo xmlns:a="http://schemas.openxmlformats.org/drawingml/2006/main" xmlns:r="http://schemas.openxmlformats.org/officeDocument/2006/relationships" xmlns:p1510="http://schemas.microsoft.com/office/powerpoint/2015/10/main">
   <p1510:revLst>
-    <p1510:client id="{271EF2A3-C3E8-744F-8708-2D5C3BF0E3DA}" v="88" dt="2026-04-05T18:30:32.456"/>
-    <p1510:client id="{34C7F323-16E7-4988-9A00-92964015F1BC}" v="264" dt="2026-04-06T12:53:53.771"/>
-    <p1510:client id="{860E1416-D5E4-3957-4DF4-AD97798D148F}" v="1" dt="2026-04-06T16:12:16.721"/>
+    <p1510:client id="{09E1DF11-A0FC-4E6A-AEEC-8ED5BBE9C614}" v="145" dt="2026-04-21T13:30:40.861"/>
+    <p1510:client id="{B961DA65-9606-461C-B6C5-74D3BC955147}" v="4" dt="2026-04-21T13:14:38.825"/>
   </p1510:revLst>
 </p1510:revInfo>
 </file>
 
-<file path=ppt/comments/modernComment_101_829F7A32.xml><?xml version="1.0" encoding="utf-8"?>
+<file path=ppt/comments/modernComment_107_92BCBB82.xml><?xml version="1.0" encoding="utf-8"?>
 <p188:cmLst xmlns:a="http://schemas.openxmlformats.org/drawingml/2006/main" xmlns:r="http://schemas.openxmlformats.org/officeDocument/2006/relationships" xmlns:p188="http://schemas.microsoft.com/office/powerpoint/2018/8/main">
-  <p188:cm id="{F9137784-242F-4F40-AAD9-13B014F066E0}" authorId="{CC4A2A3F-1530-EB32-106A-B872D3915608}" status="resolved" created="2026-03-25T12:45:49.660" complete="100000">
-    <pc:sldMkLst xmlns:pc="http://schemas.microsoft.com/office/powerpoint/2013/main/command">
-      <pc:docMk/>
-      <pc:sldMk cId="2191489586" sldId="257"/>
-    </pc:sldMkLst>
+  <p188:cm id="{DE20B68E-0BE5-49CD-97EF-2293B56227F1}" authorId="{51209FD0-B1C6-01DC-9620-97BA2F7BA4AD}" created="2026-04-21T13:27:54.437">
+    <ac:txMkLst xmlns:ac="http://schemas.microsoft.com/office/drawing/2013/main/command">
+      <pc:docMk xmlns:pc="http://schemas.microsoft.com/office/powerpoint/2013/main/command"/>
+      <pc:sldMk xmlns:pc="http://schemas.microsoft.com/office/powerpoint/2013/main/command" cId="2461842306" sldId="263"/>
+      <ac:graphicFrameMk id="2" creationId="{47CDCC5E-9C15-E3F5-3F43-41BC49894F59}"/>
+      <ac:tblMk/>
+      <ac:tcMk rowId="2121768640" colId="706587062"/>
+      <ac:txMk cp="0" len="7">
+        <ac:context len="8" hash="660429891"/>
+      </ac:txMk>
+    </ac:txMkLst>
+    <p188:pos x="4419219" y="891495"/>
     <p188:txBody>
       <a:bodyPr/>
       <a:lstStyle/>
       <a:p>
         <a:r>
           <a:rPr lang="en-US"/>
-          <a:t>ACCD includes a results letter with site average, mapped results, expanded results in excel, and request for call to explain results and options.  Should we add expanded results and an option to call?</a:t>
-        </a:r>
-      </a:p>
-    </p188:txBody>
-  </p188:cm>
-  <p188:cm id="{3E128D25-F597-482E-AA95-439A5E1AA90A}" authorId="{CC4A2A3F-1530-EB32-106A-B872D3915608}" status="resolved" created="2026-03-25T13:19:10.381" complete="100000">
-    <pc:sldMkLst xmlns:pc="http://schemas.microsoft.com/office/powerpoint/2013/main/command">
-      <pc:docMk/>
-      <pc:sldMk cId="2191489586" sldId="257"/>
-    </pc:sldMkLst>
-    <p188:txBody>
-      <a:bodyPr/>
-      <a:lstStyle/>
-      <a:p>
-        <a:r>
-          <a:rPr lang="en-US"/>
-          <a:t>We might want to remind the recipient of our mission while subtly addressing limitations.  Here's my take on how it could be reworded: Thank you for your participation with the Urban Soil Co-Lab.  The purpose of our soil screenings is to provide an educational opportunity regarding lead health concerns and to connect residents with resources.  Attached you will find the results of the samples we collected from your property as well as information about how we collect and analyze soil.  We have also included resources and best practices from experts to help you understand your options moving forward.  </a:t>
-        </a:r>
-      </a:p>
-    </p188:txBody>
-  </p188:cm>
-  <p188:cm id="{719CE9B4-FA32-46E9-AB45-DD0F9F1A4FBC}" authorId="{51209FD0-B1C6-01DC-9620-97BA2F7BA4AD}" status="resolved" created="2026-04-01T15:38:09.010" complete="100000">
-    <ac:txMkLst xmlns:ac="http://schemas.microsoft.com/office/drawing/2013/main/command">
-      <pc:docMk xmlns:pc="http://schemas.microsoft.com/office/powerpoint/2013/main/command"/>
-      <pc:sldMk xmlns:pc="http://schemas.microsoft.com/office/powerpoint/2013/main/command" cId="2191489586" sldId="257"/>
-      <ac:spMk id="3" creationId="{E18B016F-BE3E-A30E-98DF-79FBC7A05DD4}"/>
-      <ac:txMk cp="2447" len="39">
-        <ac:context len="2490" hash="710910814"/>
-      </ac:txMk>
-    </ac:txMkLst>
-    <p188:pos x="2646296" y="3653617"/>
-    <p188:txBody>
-      <a:bodyPr/>
-      <a:lstStyle/>
-      <a:p>
-        <a:r>
-          <a:rPr lang="en-US"/>
-          <a:t>Add "This report includes: [bullet list in order of packet] a Summary of your results,... Info from NY Soil Health on how to understand your lead screening results and best practices to protect yourself..."</a:t>
-        </a:r>
-      </a:p>
-    </p188:txBody>
-  </p188:cm>
-  <p188:cm id="{B482BAA7-0289-46DB-BDB6-4409388CE37A}" authorId="{51209FD0-B1C6-01DC-9620-97BA2F7BA4AD}" status="resolved" created="2026-04-01T15:38:39.950" complete="100000">
-    <ac:txMkLst xmlns:ac="http://schemas.microsoft.com/office/drawing/2013/main/command">
-      <pc:docMk xmlns:pc="http://schemas.microsoft.com/office/powerpoint/2013/main/command"/>
-      <pc:sldMk xmlns:pc="http://schemas.microsoft.com/office/powerpoint/2013/main/command" cId="2191489586" sldId="257"/>
-      <ac:spMk id="3" creationId="{E18B016F-BE3E-A30E-98DF-79FBC7A05DD4}"/>
-      <ac:txMk cp="227" len="142">
-        <ac:context len="1673" hash="2501818773"/>
-      </ac:txMk>
-    </ac:txMkLst>
-    <p188:pos x="3864293" y="2908875"/>
-    <p188:txBody>
-      <a:bodyPr/>
-      <a:lstStyle/>
-      <a:p>
-        <a:r>
-          <a:rPr lang="en-US"/>
-          <a:t>Where is disclaimer language adapted from the ACCD document?</a:t>
-        </a:r>
-      </a:p>
-    </p188:txBody>
-  </p188:cm>
-</p188:cmLst>
-</file>
-
-<file path=ppt/comments/modernComment_107_92BCBB82.xml><?xml version="1.0" encoding="utf-8"?>
-<p188:cmLst xmlns:a="http://schemas.openxmlformats.org/drawingml/2006/main" xmlns:r="http://schemas.openxmlformats.org/officeDocument/2006/relationships" xmlns:p188="http://schemas.microsoft.com/office/powerpoint/2018/8/main">
-  <p188:cm id="{A0EDD5BC-44CB-4939-9ADC-74B0CDCF2062}" authorId="{CC4A2A3F-1530-EB32-106A-B872D3915608}" status="resolved" created="2026-04-01T14:08:22.815" complete="100000">
-    <ac:txMkLst xmlns:ac="http://schemas.microsoft.com/office/drawing/2013/main/command">
-      <pc:docMk xmlns:pc="http://schemas.microsoft.com/office/powerpoint/2013/main/command"/>
-      <pc:sldMk xmlns:pc="http://schemas.microsoft.com/office/powerpoint/2013/main/command" cId="2461842306" sldId="263"/>
-      <ac:graphicFrameMk id="2" creationId="{106F5ACB-2A61-E03D-7AAA-32056464124B}"/>
-      <ac:tblMk/>
-      <ac:tcMk rowId="2858914813" colId="59144178"/>
-      <ac:txMk cp="0" len="61">
-        <ac:context len="62" hash="1704144627"/>
-      </ac:txMk>
-    </ac:txMkLst>
-    <p188:replyLst>
-      <p188:reply id="{45A0D4E9-5A82-4C34-A702-3A41CB73F423}" authorId="{51209FD0-B1C6-01DC-9620-97BA2F7BA4AD}" created="2026-04-01T15:34:36.707">
-        <p188:txBody>
-          <a:bodyPr/>
-          <a:lstStyle/>
-          <a:p>
-            <a:r>
-              <a:rPr lang="en-US"/>
-              <a:t>I think it's better to rely on the NY Soil Health Sheet</a:t>
-            </a:r>
-          </a:p>
-        </p188:txBody>
-      </p188:reply>
-    </p188:replyLst>
-    <p188:txBody>
-      <a:bodyPr/>
-      <a:lstStyle/>
-      <a:p>
-        <a:r>
-          <a:rPr lang="en-US"/>
-          <a:t>I can't seem to find the DEC guidelines</a:t>
-        </a:r>
-      </a:p>
-    </p188:txBody>
-  </p188:cm>
-  <p188:cm id="{5E2C0F37-12BF-4009-B6AB-8DF67046FDC4}" authorId="{51209FD0-B1C6-01DC-9620-97BA2F7BA4AD}" created="2026-04-01T15:34:18.142">
-    <ac:deMkLst xmlns:ac="http://schemas.microsoft.com/office/drawing/2013/main/command">
-      <pc:docMk xmlns:pc="http://schemas.microsoft.com/office/powerpoint/2013/main/command"/>
-      <pc:sldMk xmlns:pc="http://schemas.microsoft.com/office/powerpoint/2013/main/command" cId="2461842306" sldId="263"/>
-      <ac:spMk id="3" creationId="{E85560BE-110C-16A9-F3BB-C249B3821B4D}"/>
-    </ac:deMkLst>
-    <p188:txBody>
-      <a:bodyPr/>
-      <a:lstStyle/>
-      <a:p>
-        <a:r>
-          <a:rPr lang="en-US"/>
-          <a:t>Maybe these can be worked into the Map of Yard panel?</a:t>
-        </a:r>
-      </a:p>
-    </p188:txBody>
-  </p188:cm>
-  <p188:cm id="{83160E1A-1289-43E5-BF12-CE04C2C78355}" authorId="{51209FD0-B1C6-01DC-9620-97BA2F7BA4AD}" created="2026-04-03T15:53:05.243">
-    <ac:deMkLst xmlns:ac="http://schemas.microsoft.com/office/drawing/2013/main/command">
-      <pc:docMk xmlns:pc="http://schemas.microsoft.com/office/powerpoint/2013/main/command"/>
-      <pc:sldMk xmlns:pc="http://schemas.microsoft.com/office/powerpoint/2013/main/command" cId="2461842306" sldId="263"/>
-      <ac:spMk id="13" creationId="{921DE565-01FC-4D2D-E25D-CC78CB9B638B}"/>
-    </ac:deMkLst>
-    <p188:txBody>
-      <a:bodyPr/>
-      <a:lstStyle/>
-      <a:p>
-        <a:r>
-          <a:rPr lang="en-US"/>
-          <a:t>This is where map w/ background goes</a:t>
-        </a:r>
-      </a:p>
-    </p188:txBody>
-  </p188:cm>
-</p188:cmLst>
-</file>
-
-<file path=ppt/comments/modernComment_10B_AA08C85C.xml><?xml version="1.0" encoding="utf-8"?>
-<p188:cmLst xmlns:a="http://schemas.openxmlformats.org/drawingml/2006/main" xmlns:r="http://schemas.openxmlformats.org/officeDocument/2006/relationships" xmlns:p188="http://schemas.microsoft.com/office/powerpoint/2018/8/main">
-  <p188:cm id="{D7DFBDB3-E84D-4F6D-A6C6-B791D50C1C84}" authorId="{51209FD0-B1C6-01DC-9620-97BA2F7BA4AD}" created="2025-12-18T20:46:06.801">
-    <pc:sldMkLst xmlns:pc="http://schemas.microsoft.com/office/powerpoint/2013/main/command">
-      <pc:docMk/>
-      <pc:sldMk cId="2852702300" sldId="267"/>
-    </pc:sldMkLst>
-    <p188:txBody>
-      <a:bodyPr/>
-      <a:lstStyle/>
-      <a:p>
-        <a:r>
-          <a:rPr lang="en-US"/>
-          <a:t>[@Cole Terwilliger] </a:t>
-        </a:r>
-      </a:p>
-    </p188:txBody>
-  </p188:cm>
-</p188:cmLst>
-</file>
-
-<file path=ppt/comments/modernComment_10D_D982F1F9.xml><?xml version="1.0" encoding="utf-8"?>
-<p188:cmLst xmlns:a="http://schemas.openxmlformats.org/drawingml/2006/main" xmlns:r="http://schemas.openxmlformats.org/officeDocument/2006/relationships" xmlns:p188="http://schemas.microsoft.com/office/powerpoint/2018/8/main">
-  <p188:cm id="{13609A07-85DB-480E-8F62-3A173F39D827}" authorId="{51209FD0-B1C6-01DC-9620-97BA2F7BA4AD}" status="resolved" created="2026-04-01T15:29:11.871" complete="100000">
-    <ac:deMkLst xmlns:ac="http://schemas.microsoft.com/office/drawing/2013/main/command">
-      <pc:docMk xmlns:pc="http://schemas.microsoft.com/office/powerpoint/2013/main/command"/>
-      <pc:sldMk xmlns:pc="http://schemas.microsoft.com/office/powerpoint/2013/main/command" cId="3649237497" sldId="269"/>
-      <ac:spMk id="13" creationId="{6FF9106F-00B9-01F6-46A1-6DDA8610C8A4}"/>
-    </ac:deMkLst>
-    <p188:replyLst>
-      <p188:reply id="{98FF97CB-3E03-41AB-85BD-5A238BDE89ED}" authorId="{51209FD0-B1C6-01DC-9620-97BA2F7BA4AD}" created="2026-04-01T15:33:35.073">
-        <p188:txBody>
-          <a:bodyPr/>
-          <a:lstStyle/>
-          <a:p>
-            <a:r>
-              <a:rPr lang="en-US"/>
-              <a:t>On second thought, I think this is better in the letter</a:t>
-            </a:r>
-          </a:p>
-        </p188:txBody>
-      </p188:reply>
-      <p188:reply id="{2A505ED5-DEAF-4C3B-AC76-2C14DAB62983}" authorId="{51209FD0-B1C6-01DC-9620-97BA2F7BA4AD}" created="2026-04-01T15:35:16.884">
-        <p188:txBody>
-          <a:bodyPr/>
-          <a:lstStyle/>
-          <a:p>
-            <a:r>
-              <a:rPr lang="en-US"/>
-              <a:t>On third thought, I like what we say in the letter better. Let's just cut this</a:t>
-            </a:r>
-          </a:p>
-        </p188:txBody>
-      </p188:reply>
-    </p188:replyLst>
-    <p188:txBody>
-      <a:bodyPr/>
-      <a:lstStyle/>
-      <a:p>
-        <a:r>
-          <a:rPr lang="en-US"/>
-          <a:t>Confused why this is in it's own box. Maybe a header "Our goal"</a:t>
-        </a:r>
-      </a:p>
-    </p188:txBody>
-  </p188:cm>
-  <p188:cm id="{1878E643-FFF4-4E4C-9827-0B6369F709A7}" authorId="{51209FD0-B1C6-01DC-9620-97BA2F7BA4AD}" created="2026-04-01T15:32:57.801">
-    <pc:sldMkLst xmlns:pc="http://schemas.microsoft.com/office/powerpoint/2013/main/command">
-      <pc:docMk/>
-      <pc:sldMk cId="3649237497" sldId="269"/>
-    </pc:sldMkLst>
-    <p188:txBody>
-      <a:bodyPr/>
-      <a:lstStyle/>
-      <a:p>
-        <a:r>
-          <a:rPr lang="en-US"/>
-          <a:t>Still not sure if the Executive Summary and TOC are necessary. I think we should think of this as a Summary. The sequence should be 1) Letter, 2) blank page, 3) Summary, 4) Results so that when pages 3 and 4 are printed double sided they hold all the most important info. </a:t>
-        </a:r>
-      </a:p>
-    </p188:txBody>
-  </p188:cm>
-  <p188:cm id="{A2DC865A-DA13-42F2-83B2-10803C1964B2}" authorId="{51209FD0-B1C6-01DC-9620-97BA2F7BA4AD}" created="2026-04-03T15:52:49.555">
-    <ac:deMkLst xmlns:ac="http://schemas.microsoft.com/office/drawing/2013/main/command">
-      <pc:docMk xmlns:pc="http://schemas.microsoft.com/office/powerpoint/2013/main/command"/>
-      <pc:sldMk xmlns:pc="http://schemas.microsoft.com/office/powerpoint/2013/main/command" cId="3649237497" sldId="269"/>
-      <ac:spMk id="15" creationId="{F5C818B7-D96E-7E4F-467B-61C57FEFE708}"/>
-    </ac:deMkLst>
-    <p188:txBody>
-      <a:bodyPr/>
-      <a:lstStyle/>
-      <a:p>
-        <a:r>
-          <a:rPr lang="en-US"/>
-          <a:t>This where map w/o background goes</a:t>
-        </a:r>
-      </a:p>
-    </p188:txBody>
-  </p188:cm>
-  <p188:cm id="{C6E05D19-A041-48CD-A562-D9ACDB052DD3}" authorId="{51209FD0-B1C6-01DC-9620-97BA2F7BA4AD}" created="2026-04-03T15:57:59.870">
-    <ac:deMkLst xmlns:ac="http://schemas.microsoft.com/office/drawing/2013/main/command">
-      <pc:docMk xmlns:pc="http://schemas.microsoft.com/office/powerpoint/2013/main/command"/>
-      <pc:sldMk xmlns:pc="http://schemas.microsoft.com/office/powerpoint/2013/main/command" cId="3649237497" sldId="269"/>
-      <ac:picMk id="18" creationId="{43580737-08D3-0FA1-5466-C9867AB0EFA0}"/>
-    </ac:deMkLst>
-    <p188:replyLst>
-      <p188:reply id="{ECF2C5CE-08E4-421A-8AAA-C2F3A2DFA6B1}" authorId="{CC4A2A3F-1530-EB32-106A-B872D3915608}" created="2026-04-06T16:12:16.721">
-        <p188:txBody>
-          <a:bodyPr/>
-          <a:lstStyle/>
-          <a:p>
-            <a:r>
-              <a:rPr lang="en-US"/>
-              <a:t>Do we have edit access to this canva?  I think that's the only way we can download it with links so that it can be added to the website.</a:t>
-            </a:r>
-          </a:p>
-        </p188:txBody>
-      </p188:reply>
-    </p188:replyLst>
-    <p188:txBody>
-      <a:bodyPr/>
-      <a:lstStyle/>
-      <a:p>
-        <a:r>
-          <a:rPr lang="en-US"/>
-          <a:t>Need to get the resources out of Canva</a:t>
-        </a:r>
-      </a:p>
-    </p188:txBody>
-  </p188:cm>
-  <p188:cm id="{A1A87949-17B3-6040-B234-0B71E3E81C9C}" authorId="{51209FD0-B1C6-01DC-9620-97BA2F7BA4AD}" created="2026-04-05T18:10:50.287">
-    <ac:txMkLst xmlns:ac="http://schemas.microsoft.com/office/drawing/2013/main/command">
-      <pc:docMk xmlns:pc="http://schemas.microsoft.com/office/powerpoint/2013/main/command"/>
-      <pc:sldMk xmlns:pc="http://schemas.microsoft.com/office/powerpoint/2013/main/command" cId="3649237497" sldId="269"/>
-      <ac:spMk id="4" creationId="{DE45DF78-3A28-316F-0D82-759D1710B983}"/>
-      <ac:txMk cp="167">
-        <ac:context len="171" hash="3263612777"/>
-      </ac:txMk>
-    </ac:txMkLst>
-    <p188:pos x="1434527" y="876692"/>
-    <p188:replyLst>
-      <p188:reply id="{8C61D5C5-95F9-46C0-8B00-D0CC995F7A48}" authorId="{CC4A2A3F-1530-EB32-106A-B872D3915608}" created="2026-04-06T12:53:53.698">
-        <p188:txBody>
-          <a:bodyPr/>
-          <a:lstStyle/>
-          <a:p>
-            <a:r>
-              <a:rPr lang="en-US"/>
-              <a:t>This should be fixed now</a:t>
-            </a:r>
-          </a:p>
-        </p188:txBody>
-      </p188:reply>
-    </p188:replyLst>
-    <p188:txBody>
-      <a:bodyPr/>
-      <a:lstStyle/>
-      <a:p>
-        <a:r>
-          <a:rPr lang="en-US"/>
-          <a:t>why is this breaking into two lines???</a:t>
+          <a:t>If either Front or Backyard are not sampled, enter "Not sampled" for each column</a:t>
         </a:r>
       </a:p>
     </p188:txBody>
@@ -551,9 +253,9 @@
             </a:lvl1pPr>
           </a:lstStyle>
           <a:p>
-            <a:fld id="{4D85D46A-85FA-4604-B110-772D7F3DC81F}" type="datetime1">
+            <a:fld id="{53883EC7-3B6C-426B-9868-E849428E1665}" type="datetime1">
               <a:rPr lang="en-US" smtClean="0"/>
-              <a:t>4/8/2026</a:t>
+              <a:t>5/25/2026</a:t>
             </a:fld>
             <a:endParaRPr lang="en-US"/>
           </a:p>
@@ -729,9 +431,9 @@
             </a:lvl1pPr>
           </a:lstStyle>
           <a:p>
-            <a:fld id="{3E4C6C32-1B65-4B84-BAA9-E6E08ACF9132}" type="datetime1">
+            <a:fld id="{58899A4A-3FCE-4140-B4FF-E28028908587}" type="datetime1">
               <a:rPr lang="en-US" smtClean="0"/>
-              <a:t>4/8/2026</a:t>
+              <a:t>5/25/2026</a:t>
             </a:fld>
             <a:endParaRPr lang="en-US"/>
           </a:p>
@@ -1126,9 +828,9 @@
           <a:bodyPr/>
           <a:lstStyle/>
           <a:p>
-            <a:fld id="{12B69A78-F019-493E-BC92-453AB727FE65}" type="datetime1">
+            <a:fld id="{ABC81074-3128-4680-AF74-C8F155151E2D}" type="datetime1">
               <a:rPr lang="en-US" smtClean="0"/>
-              <a:t>4/8/2026</a:t>
+              <a:t>5/25/2026</a:t>
             </a:fld>
             <a:endParaRPr lang="en-US"/>
           </a:p>
@@ -1294,9 +996,9 @@
           <a:bodyPr/>
           <a:lstStyle/>
           <a:p>
-            <a:fld id="{C2CFD448-D683-4940-8981-0136BE2E8F48}" type="datetime1">
+            <a:fld id="{F533F489-0747-44C8-8561-DEBBFB78C708}" type="datetime1">
               <a:rPr lang="en-US" smtClean="0"/>
-              <a:t>4/8/2026</a:t>
+              <a:t>5/25/2026</a:t>
             </a:fld>
             <a:endParaRPr lang="en-US"/>
           </a:p>
@@ -1472,9 +1174,9 @@
           <a:bodyPr/>
           <a:lstStyle/>
           <a:p>
-            <a:fld id="{6A76F80C-317C-49F0-805C-4C4B24D1C8B4}" type="datetime1">
+            <a:fld id="{6FC26DF6-4002-41AF-9BE4-A98E94BCAAA1}" type="datetime1">
               <a:rPr lang="en-US" smtClean="0"/>
-              <a:t>4/8/2026</a:t>
+              <a:t>5/25/2026</a:t>
             </a:fld>
             <a:endParaRPr lang="en-US"/>
           </a:p>
@@ -1640,9 +1342,9 @@
           <a:bodyPr/>
           <a:lstStyle/>
           <a:p>
-            <a:fld id="{66A18F0C-BD90-478C-AC2D-28F9FFE1887F}" type="datetime1">
+            <a:fld id="{AA2AF5B0-4F54-4AE7-A208-3CE9354CAE71}" type="datetime1">
               <a:rPr lang="en-US" smtClean="0"/>
-              <a:t>4/8/2026</a:t>
+              <a:t>5/25/2026</a:t>
             </a:fld>
             <a:endParaRPr lang="en-US"/>
           </a:p>
@@ -1885,9 +1587,9 @@
           <a:bodyPr/>
           <a:lstStyle/>
           <a:p>
-            <a:fld id="{0866789D-4E5F-42DA-8863-20255882CDDF}" type="datetime1">
+            <a:fld id="{817E5F1E-8F60-4685-A202-6F0C81CF0EEC}" type="datetime1">
               <a:rPr lang="en-US" smtClean="0"/>
-              <a:t>4/8/2026</a:t>
+              <a:t>5/25/2026</a:t>
             </a:fld>
             <a:endParaRPr lang="en-US"/>
           </a:p>
@@ -2114,9 +1816,9 @@
           <a:bodyPr/>
           <a:lstStyle/>
           <a:p>
-            <a:fld id="{44E5A0F1-CFE0-4CF9-B26C-6719B93383CE}" type="datetime1">
+            <a:fld id="{B09EF5B1-D415-4206-A82F-FB47D399BA21}" type="datetime1">
               <a:rPr lang="en-US" smtClean="0"/>
-              <a:t>4/8/2026</a:t>
+              <a:t>5/25/2026</a:t>
             </a:fld>
             <a:endParaRPr lang="en-US"/>
           </a:p>
@@ -2478,9 +2180,9 @@
           <a:bodyPr/>
           <a:lstStyle/>
           <a:p>
-            <a:fld id="{974C822E-CE8E-40F7-AE7E-635F1B9E2AB9}" type="datetime1">
+            <a:fld id="{A33CC9D5-F9D1-40CF-8505-2D33497BF4E9}" type="datetime1">
               <a:rPr lang="en-US" smtClean="0"/>
-              <a:t>4/8/2026</a:t>
+              <a:t>5/25/2026</a:t>
             </a:fld>
             <a:endParaRPr lang="en-US"/>
           </a:p>
@@ -2595,9 +2297,9 @@
           <a:bodyPr/>
           <a:lstStyle/>
           <a:p>
-            <a:fld id="{1C38D936-ED3F-466E-BD54-0DC8155C5FE1}" type="datetime1">
+            <a:fld id="{5C56F785-6734-45DB-87AF-3AC118D0F35A}" type="datetime1">
               <a:rPr lang="en-US" smtClean="0"/>
-              <a:t>4/8/2026</a:t>
+              <a:t>5/25/2026</a:t>
             </a:fld>
             <a:endParaRPr lang="en-US"/>
           </a:p>
@@ -2690,9 +2392,9 @@
           <a:bodyPr/>
           <a:lstStyle/>
           <a:p>
-            <a:fld id="{0262A9E4-B01E-4A99-9D60-1CF0624427C3}" type="datetime1">
+            <a:fld id="{8E254923-DB1C-45AB-B139-662E574EE105}" type="datetime1">
               <a:rPr lang="en-US" smtClean="0"/>
-              <a:t>4/8/2026</a:t>
+              <a:t>5/25/2026</a:t>
             </a:fld>
             <a:endParaRPr lang="en-US"/>
           </a:p>
@@ -2965,9 +2667,9 @@
           <a:bodyPr/>
           <a:lstStyle/>
           <a:p>
-            <a:fld id="{823FE264-85F8-42D5-AC78-C96E95308F30}" type="datetime1">
+            <a:fld id="{2E09C110-74E6-4699-B1E8-87CBED288B1F}" type="datetime1">
               <a:rPr lang="en-US" smtClean="0"/>
-              <a:t>4/8/2026</a:t>
+              <a:t>5/25/2026</a:t>
             </a:fld>
             <a:endParaRPr lang="en-US"/>
           </a:p>
@@ -3220,9 +2922,9 @@
           <a:bodyPr/>
           <a:lstStyle/>
           <a:p>
-            <a:fld id="{8DAFE50A-E517-47C2-8764-2A15B3B711C5}" type="datetime1">
+            <a:fld id="{23452CDB-C7C8-4CD9-AC35-7D9EB06CFB47}" type="datetime1">
               <a:rPr lang="en-US" smtClean="0"/>
-              <a:t>4/8/2026</a:t>
+              <a:t>5/25/2026</a:t>
             </a:fld>
             <a:endParaRPr lang="en-US"/>
           </a:p>
@@ -3431,9 +3133,9 @@
             </a:lvl1pPr>
           </a:lstStyle>
           <a:p>
-            <a:fld id="{564C5E8D-582F-4D33-8A0E-C9D907BF9168}" type="datetime1">
+            <a:fld id="{CE07574C-0E39-4F4D-BDD5-E1A25C485172}" type="datetime1">
               <a:rPr lang="en-US" smtClean="0"/>
-              <a:t>4/8/2026</a:t>
+              <a:t>5/25/2026</a:t>
             </a:fld>
             <a:endParaRPr lang="en-US"/>
           </a:p>
@@ -3929,7 +3631,7 @@
                 <a:ea typeface="Calibri"/>
                 <a:cs typeface="Calibri"/>
               </a:rPr>
-              <a:t>Address of Resident</a:t>
+              <a:t>Address of Resident from Site Analysis Database  </a:t>
             </a:r>
             <a:r>
               <a:rPr lang="en-US" sz="1350">
@@ -3937,10 +3639,26 @@
                 <a:ea typeface="Calibri"/>
                 <a:cs typeface="Calibri"/>
               </a:rPr>
-              <a:t>						</a:t>
-            </a:r>
-            <a:r>
-              <a:rPr lang="en-US" sz="1350">
+              <a:t>	           </a:t>
+            </a:r>
+            <a:endParaRPr lang="en-US" sz="1350">
+              <a:highlight>
+                <a:srgbClr val="FFFF00"/>
+              </a:highlight>
+              <a:latin typeface="Perpetua"/>
+              <a:ea typeface="Calibri"/>
+              <a:cs typeface="Calibri"/>
+            </a:endParaRPr>
+          </a:p>
+          <a:p>
+            <a:pPr marL="0" indent="0" algn="r">
+              <a:lnSpc>
+                <a:spcPct val="100000"/>
+              </a:lnSpc>
+              <a:buNone/>
+            </a:pPr>
+            <a:r>
+              <a:rPr lang="en-US" sz="1400">
                 <a:highlight>
                   <a:srgbClr val="FFFF00"/>
                 </a:highlight>
@@ -3950,24 +3668,7 @@
               </a:rPr>
               <a:t>Date</a:t>
             </a:r>
-            <a:endParaRPr lang="en-US" sz="1350">
-              <a:latin typeface="Perpetua"/>
-              <a:ea typeface="Calibri"/>
-              <a:cs typeface="Arial"/>
-            </a:endParaRPr>
-          </a:p>
-          <a:p>
-            <a:pPr marL="0" indent="0">
-              <a:lnSpc>
-                <a:spcPct val="100000"/>
-              </a:lnSpc>
-              <a:buNone/>
-            </a:pPr>
-            <a:endParaRPr lang="en-US" sz="1350">
-              <a:latin typeface="Perpetua"/>
-              <a:ea typeface="Calibri"/>
-              <a:cs typeface="Calibri"/>
-            </a:endParaRPr>
+            <a:endParaRPr lang="en-US"/>
           </a:p>
           <a:p>
             <a:pPr marL="0" indent="0">
@@ -4197,41 +3898,11 @@
           <a:bodyPr/>
           <a:lstStyle/>
           <a:p>
-            <a:fld id="{9B458C23-DDA8-418D-810B-C7DBD5581D66}" type="datetime1">
+            <a:fld id="{B0B9C900-5871-4D9E-86A4-9327B88D9118}" type="datetime1">
               <a:rPr lang="en-US" smtClean="0"/>
-              <a:t>4/8/2026</a:t>
+              <a:t>5/25/2026</a:t>
             </a:fld>
             <a:endParaRPr lang="en-US"/>
-          </a:p>
-        </p:txBody>
-      </p:sp>
-      <p:sp>
-        <p:nvSpPr>
-          <p:cNvPr id="9" name="Slide Number Placeholder 8">
-            <a:extLst>
-              <a:ext uri="{FF2B5EF4-FFF2-40B4-BE49-F238E27FC236}">
-                <a16:creationId xmlns:a16="http://schemas.microsoft.com/office/drawing/2014/main" id="{4049A9C4-03BC-CB19-A5D2-B29C6637AB39}"/>
-              </a:ext>
-            </a:extLst>
-          </p:cNvPr>
-          <p:cNvSpPr>
-            <a:spLocks noGrp="1"/>
-          </p:cNvSpPr>
-          <p:nvPr>
-            <p:ph type="sldNum" sz="quarter" idx="12"/>
-          </p:nvPr>
-        </p:nvSpPr>
-        <p:spPr/>
-        <p:txBody>
-          <a:bodyPr/>
-          <a:lstStyle/>
-          <a:p>
-            <a:r>
-              <a:rPr lang="en-US" sz="1000">
-                <a:latin typeface="Aptos"/>
-              </a:rPr>
-              <a:t>2</a:t>
-            </a:r>
           </a:p>
         </p:txBody>
       </p:sp>
@@ -4250,7 +3921,7 @@
           <p:nvPr/>
         </p:nvPicPr>
         <p:blipFill>
-          <a:blip r:embed="rId3">
+          <a:blip r:embed="rId2">
             <a:extLst>
               <a:ext uri="{28A0092B-C50C-407E-A947-70E740481C1C}">
                 <a14:useLocalDpi xmlns:a14="http://schemas.microsoft.com/office/drawing/2010/main" val="0"/>
@@ -4544,6 +4215,35 @@
           </a:fontRef>
         </p:style>
       </p:cxnSp>
+      <p:sp>
+        <p:nvSpPr>
+          <p:cNvPr id="5" name="Slide Number Placeholder 4">
+            <a:extLst>
+              <a:ext uri="{FF2B5EF4-FFF2-40B4-BE49-F238E27FC236}">
+                <a16:creationId xmlns:a16="http://schemas.microsoft.com/office/drawing/2014/main" id="{1ACDC6A6-6568-7FF0-73B5-41A79DA85523}"/>
+              </a:ext>
+            </a:extLst>
+          </p:cNvPr>
+          <p:cNvSpPr>
+            <a:spLocks noGrp="1"/>
+          </p:cNvSpPr>
+          <p:nvPr>
+            <p:ph type="sldNum" sz="quarter" idx="12"/>
+          </p:nvPr>
+        </p:nvSpPr>
+        <p:spPr/>
+        <p:txBody>
+          <a:bodyPr/>
+          <a:lstStyle/>
+          <a:p>
+            <a:fld id="{AF85498A-A7D2-4202-8B58-6C83C98E0B39}" type="slidenum">
+              <a:rPr lang="en-US" smtClean="0"/>
+              <a:t>1</a:t>
+            </a:fld>
+            <a:endParaRPr lang="en-US"/>
+          </a:p>
+        </p:txBody>
+      </p:sp>
     </p:spTree>
     <p:extLst>
       <p:ext uri="{BB962C8B-B14F-4D97-AF65-F5344CB8AC3E}">
@@ -4554,11 +4254,6 @@
   <p:clrMapOvr>
     <a:masterClrMapping/>
   </p:clrMapOvr>
-  <p:extLst>
-    <p:ext uri="{6950BFC3-D8DA-4A85-94F7-54DA5524770B}">
-      <p188:commentRel xmlns:p188="http://schemas.microsoft.com/office/powerpoint/2018/8/main" r:id="rId2"/>
-    </p:ext>
-  </p:extLst>
 </p:sld>
 </file>
 
@@ -4817,38 +4512,9 @@
           <a:bodyPr/>
           <a:lstStyle/>
           <a:p>
-            <a:fld id="{974C822E-CE8E-40F7-AE7E-635F1B9E2AB9}" type="datetime1">
+            <a:fld id="{825A80E9-E8D0-4BDD-9D21-AC7271F240DB}" type="datetime1">
               <a:rPr lang="en-US" smtClean="0"/>
-              <a:t>4/8/2026</a:t>
-            </a:fld>
-            <a:endParaRPr lang="en-US"/>
-          </a:p>
-        </p:txBody>
-      </p:sp>
-      <p:sp>
-        <p:nvSpPr>
-          <p:cNvPr id="8" name="Slide Number Placeholder 7">
-            <a:extLst>
-              <a:ext uri="{FF2B5EF4-FFF2-40B4-BE49-F238E27FC236}">
-                <a16:creationId xmlns:a16="http://schemas.microsoft.com/office/drawing/2014/main" id="{6EFAF4F7-E3FA-8BB8-4DE9-C05E0975B164}"/>
-              </a:ext>
-            </a:extLst>
-          </p:cNvPr>
-          <p:cNvSpPr>
-            <a:spLocks noGrp="1"/>
-          </p:cNvSpPr>
-          <p:nvPr>
-            <p:ph type="sldNum" sz="quarter" idx="12"/>
-          </p:nvPr>
-        </p:nvSpPr>
-        <p:spPr/>
-        <p:txBody>
-          <a:bodyPr/>
-          <a:lstStyle/>
-          <a:p>
-            <a:fld id="{AF85498A-A7D2-4202-8B58-6C83C98E0B39}" type="slidenum">
-              <a:rPr lang="en-US" smtClean="0"/>
-              <a:t>2</a:t>
+              <a:t>5/25/2026</a:t>
             </a:fld>
             <a:endParaRPr lang="en-US"/>
           </a:p>
@@ -5524,6 +5190,35 @@
           </a:p>
         </p:txBody>
       </p:sp>
+      <p:sp>
+        <p:nvSpPr>
+          <p:cNvPr id="5" name="Slide Number Placeholder 4">
+            <a:extLst>
+              <a:ext uri="{FF2B5EF4-FFF2-40B4-BE49-F238E27FC236}">
+                <a16:creationId xmlns:a16="http://schemas.microsoft.com/office/drawing/2014/main" id="{6FCEC7B8-4CF4-84DC-6D8B-E920DA28D106}"/>
+              </a:ext>
+            </a:extLst>
+          </p:cNvPr>
+          <p:cNvSpPr>
+            <a:spLocks noGrp="1"/>
+          </p:cNvSpPr>
+          <p:nvPr>
+            <p:ph type="sldNum" sz="quarter" idx="12"/>
+          </p:nvPr>
+        </p:nvSpPr>
+        <p:spPr/>
+        <p:txBody>
+          <a:bodyPr/>
+          <a:lstStyle/>
+          <a:p>
+            <a:fld id="{AF85498A-A7D2-4202-8B58-6C83C98E0B39}" type="slidenum">
+              <a:rPr lang="en-US" smtClean="0"/>
+              <a:t>2</a:t>
+            </a:fld>
+            <a:endParaRPr lang="en-US"/>
+          </a:p>
+        </p:txBody>
+      </p:sp>
     </p:spTree>
     <p:extLst>
       <p:ext uri="{BB962C8B-B14F-4D97-AF65-F5344CB8AC3E}">
@@ -5682,38 +5377,9 @@
           <a:bodyPr/>
           <a:lstStyle/>
           <a:p>
-            <a:fld id="{974C822E-CE8E-40F7-AE7E-635F1B9E2AB9}" type="datetime1">
+            <a:fld id="{D295DDA5-1B67-4156-AC2E-06ACFE19AA3E}" type="datetime1">
               <a:rPr lang="en-US" smtClean="0"/>
-              <a:t>4/8/2026</a:t>
-            </a:fld>
-            <a:endParaRPr lang="en-US"/>
-          </a:p>
-        </p:txBody>
-      </p:sp>
-      <p:sp>
-        <p:nvSpPr>
-          <p:cNvPr id="8" name="Slide Number Placeholder 7">
-            <a:extLst>
-              <a:ext uri="{FF2B5EF4-FFF2-40B4-BE49-F238E27FC236}">
-                <a16:creationId xmlns:a16="http://schemas.microsoft.com/office/drawing/2014/main" id="{14A27F0C-7311-282F-93DC-B6CBCEFDD5CF}"/>
-              </a:ext>
-            </a:extLst>
-          </p:cNvPr>
-          <p:cNvSpPr>
-            <a:spLocks noGrp="1"/>
-          </p:cNvSpPr>
-          <p:nvPr>
-            <p:ph type="sldNum" sz="quarter" idx="12"/>
-          </p:nvPr>
-        </p:nvSpPr>
-        <p:spPr/>
-        <p:txBody>
-          <a:bodyPr/>
-          <a:lstStyle/>
-          <a:p>
-            <a:fld id="{AF85498A-A7D2-4202-8B58-6C83C98E0B39}" type="slidenum">
-              <a:rPr lang="en-US" smtClean="0"/>
-              <a:t>3</a:t>
+              <a:t>5/25/2026</a:t>
             </a:fld>
             <a:endParaRPr lang="en-US"/>
           </a:p>
@@ -5793,7 +5459,7 @@
           <p:nvPr/>
         </p:nvPicPr>
         <p:blipFill>
-          <a:blip r:embed="rId3">
+          <a:blip r:embed="rId2">
             <a:extLst>
               <a:ext uri="{28A0092B-C50C-407E-A947-70E740481C1C}">
                 <a14:useLocalDpi xmlns:a14="http://schemas.microsoft.com/office/drawing/2010/main" val="0"/>
@@ -5863,7 +5529,7 @@
           <p:nvPr/>
         </p:nvPicPr>
         <p:blipFill>
-          <a:blip r:embed="rId4"/>
+          <a:blip r:embed="rId3"/>
           <a:srcRect l="677" r="3681"/>
           <a:stretch>
             <a:fillRect/>
@@ -6044,8 +5710,8 @@
         </p:nvSpPr>
         <p:spPr>
           <a:xfrm>
-            <a:off x="5657915" y="7407470"/>
-            <a:ext cx="1431042" cy="1938992"/>
+            <a:off x="4662335" y="8046852"/>
+            <a:ext cx="2572779" cy="1384995"/>
           </a:xfrm>
           <a:prstGeom prst="rect">
             <a:avLst/>
@@ -6067,88 +5733,57 @@
           <a:lstStyle/>
           <a:p>
             <a:r>
-              <a:rPr lang="en-US" sz="1200">
+              <a:rPr lang="en-US" sz="1400">
                 <a:latin typeface="Perpetua"/>
                 <a:cs typeface="Segoe UI"/>
               </a:rPr>
-              <a:t>Scan for resources on reducing exposure and managing lead in soil:</a:t>
-            </a:r>
-          </a:p>
-          <a:p>
-            <a:endParaRPr lang="en-US" sz="1200">
+              <a:t>Scan for resources </a:t>
+            </a:r>
+          </a:p>
+          <a:p>
+            <a:r>
+              <a:rPr lang="en-US" sz="1400">
+                <a:latin typeface="Perpetua"/>
+                <a:cs typeface="Segoe UI"/>
+              </a:rPr>
+              <a:t>on reducing </a:t>
+            </a:r>
+          </a:p>
+          <a:p>
+            <a:r>
+              <a:rPr lang="en-US" sz="1400">
+                <a:latin typeface="Perpetua"/>
+                <a:cs typeface="Segoe UI"/>
+              </a:rPr>
+              <a:t>exposure and </a:t>
+            </a:r>
+          </a:p>
+          <a:p>
+            <a:r>
+              <a:rPr lang="en-US" sz="1400">
+                <a:latin typeface="Perpetua"/>
+                <a:cs typeface="Segoe UI"/>
+              </a:rPr>
+              <a:t>managing lead in </a:t>
+            </a:r>
+          </a:p>
+          <a:p>
+            <a:r>
+              <a:rPr lang="en-US" sz="1400">
+                <a:latin typeface="Perpetua"/>
+                <a:cs typeface="Segoe UI"/>
+              </a:rPr>
+              <a:t>soil:</a:t>
+            </a:r>
+          </a:p>
+          <a:p>
+            <a:endParaRPr lang="en-US" sz="1400">
               <a:latin typeface="Perpetua"/>
               <a:cs typeface="Segoe UI"/>
             </a:endParaRPr>
           </a:p>
-          <a:p>
-            <a:endParaRPr lang="en-US" sz="1200">
-              <a:latin typeface="Perpetua"/>
-              <a:cs typeface="Segoe UI"/>
-            </a:endParaRPr>
-          </a:p>
-          <a:p>
-            <a:endParaRPr lang="en-US" sz="1200">
-              <a:latin typeface="Perpetua"/>
-              <a:cs typeface="Segoe UI"/>
-            </a:endParaRPr>
-          </a:p>
-          <a:p>
-            <a:endParaRPr lang="en-US" sz="1200">
-              <a:latin typeface="Perpetua"/>
-              <a:cs typeface="Segoe UI"/>
-            </a:endParaRPr>
-          </a:p>
-          <a:p>
-            <a:endParaRPr lang="en-US" sz="1200">
-              <a:latin typeface="Perpetua"/>
-              <a:cs typeface="Segoe UI"/>
-            </a:endParaRPr>
-          </a:p>
-          <a:p>
-            <a:endParaRPr lang="en-US" sz="1200">
-              <a:latin typeface="Perpetua"/>
-              <a:cs typeface="Segoe UI"/>
-            </a:endParaRPr>
-          </a:p>
-          <a:p>
-            <a:endParaRPr lang="en-US" sz="1200">
-              <a:latin typeface="Perpetua"/>
-              <a:cs typeface="Segoe UI"/>
-            </a:endParaRPr>
-          </a:p>
-        </p:txBody>
-      </p:sp>
-      <p:pic>
-        <p:nvPicPr>
-          <p:cNvPr id="18" name="Picture 17" descr="A qr code with a few black squares&#10;&#10;AI-generated content may be incorrect.">
-            <a:extLst>
-              <a:ext uri="{FF2B5EF4-FFF2-40B4-BE49-F238E27FC236}">
-                <a16:creationId xmlns:a16="http://schemas.microsoft.com/office/drawing/2014/main" id="{43580737-08D3-0FA1-5466-C9867AB0EFA0}"/>
-              </a:ext>
-            </a:extLst>
-          </p:cNvPr>
-          <p:cNvPicPr>
-            <a:picLocks noChangeAspect="1"/>
-          </p:cNvPicPr>
-          <p:nvPr/>
-        </p:nvPicPr>
-        <p:blipFill>
-          <a:blip r:embed="rId5"/>
-          <a:srcRect l="4776" t="1994" r="2985" b="2564"/>
-          <a:stretch>
-            <a:fillRect/>
-          </a:stretch>
-        </p:blipFill>
-        <p:spPr>
-          <a:xfrm>
-            <a:off x="5768565" y="8076047"/>
-            <a:ext cx="1190175" cy="1177891"/>
-          </a:xfrm>
-          <a:prstGeom prst="rect">
-            <a:avLst/>
-          </a:prstGeom>
-        </p:spPr>
-      </p:pic>
+        </p:txBody>
+      </p:sp>
       <p:sp>
         <p:nvSpPr>
           <p:cNvPr id="20" name="Content Placeholder 3">
@@ -6586,10 +6221,10 @@
       </p:sp>
       <p:sp>
         <p:nvSpPr>
-          <p:cNvPr id="22" name="TextBox 21">
+          <p:cNvPr id="6" name="TextBox 5">
             <a:extLst>
               <a:ext uri="{FF2B5EF4-FFF2-40B4-BE49-F238E27FC236}">
-                <a16:creationId xmlns:a16="http://schemas.microsoft.com/office/drawing/2014/main" id="{056F663B-753D-BEC7-0BCB-1FC80978CD75}"/>
+                <a16:creationId xmlns:a16="http://schemas.microsoft.com/office/drawing/2014/main" id="{1EB77DF2-15C7-3138-8AF7-87826C2D916E}"/>
               </a:ext>
             </a:extLst>
           </p:cNvPr>
@@ -6598,8 +6233,8 @@
         </p:nvSpPr>
         <p:spPr>
           <a:xfrm>
-            <a:off x="2150622" y="4358886"/>
-            <a:ext cx="2863127" cy="563231"/>
+            <a:off x="1943100" y="4844534"/>
+            <a:ext cx="3886200" cy="369332"/>
           </a:xfrm>
           <a:prstGeom prst="rect">
             <a:avLst/>
@@ -6607,13 +6242,204 @@
           <a:noFill/>
         </p:spPr>
         <p:txBody>
-          <a:bodyPr rot="0" spcFirstLastPara="0" vertOverflow="overflow" horzOverflow="overflow" vert="horz" wrap="square" lIns="91440" tIns="45720" rIns="91440" bIns="45720" numCol="1" spcCol="0" rtlCol="0" fromWordArt="0" anchor="t" anchorCtr="0" forceAA="0" compatLnSpc="1">
+          <a:bodyPr wrap="square">
+            <a:spAutoFit/>
+          </a:bodyPr>
+          <a:lstStyle/>
+          <a:p>
+            <a:endParaRPr lang="en-US"/>
+          </a:p>
+        </p:txBody>
+      </p:sp>
+      <p:pic>
+        <p:nvPicPr>
+          <p:cNvPr id="16" name="Picture 15">
+            <a:extLst>
+              <a:ext uri="{FF2B5EF4-FFF2-40B4-BE49-F238E27FC236}">
+                <a16:creationId xmlns:a16="http://schemas.microsoft.com/office/drawing/2014/main" id="{25E0B5F9-DDEF-11C8-FE1D-A7C121A0E89D}"/>
+              </a:ext>
+            </a:extLst>
+          </p:cNvPr>
+          <p:cNvPicPr>
+            <a:picLocks noChangeAspect="1"/>
+          </p:cNvPicPr>
+          <p:nvPr/>
+        </p:nvPicPr>
+        <p:blipFill>
+          <a:blip r:embed="rId4">
+            <a:extLst>
+              <a:ext uri="{28A0092B-C50C-407E-A947-70E740481C1C}">
+                <a14:useLocalDpi xmlns:a14="http://schemas.microsoft.com/office/drawing/2010/main" val="0"/>
+              </a:ext>
+            </a:extLst>
+          </a:blip>
+          <a:stretch>
+            <a:fillRect/>
+          </a:stretch>
+        </p:blipFill>
+        <p:spPr>
+          <a:xfrm>
+            <a:off x="5948724" y="8131041"/>
+            <a:ext cx="1216616" cy="1216616"/>
+          </a:xfrm>
+          <a:prstGeom prst="rect">
+            <a:avLst/>
+          </a:prstGeom>
+        </p:spPr>
+      </p:pic>
+      <p:sp>
+        <p:nvSpPr>
+          <p:cNvPr id="5" name="Slide Number Placeholder 4">
+            <a:extLst>
+              <a:ext uri="{FF2B5EF4-FFF2-40B4-BE49-F238E27FC236}">
+                <a16:creationId xmlns:a16="http://schemas.microsoft.com/office/drawing/2014/main" id="{BD2A0F29-DB63-948B-22F2-AEC36E25D3FD}"/>
+              </a:ext>
+            </a:extLst>
+          </p:cNvPr>
+          <p:cNvSpPr>
+            <a:spLocks noGrp="1"/>
+          </p:cNvSpPr>
+          <p:nvPr>
+            <p:ph type="sldNum" sz="quarter" idx="12"/>
+          </p:nvPr>
+        </p:nvSpPr>
+        <p:spPr/>
+        <p:txBody>
+          <a:bodyPr/>
+          <a:lstStyle/>
+          <a:p>
+            <a:fld id="{AF85498A-A7D2-4202-8B58-6C83C98E0B39}" type="slidenum">
+              <a:rPr lang="en-US" smtClean="0"/>
+              <a:t>3</a:t>
+            </a:fld>
+            <a:endParaRPr lang="en-US"/>
+          </a:p>
+        </p:txBody>
+      </p:sp>
+      <p:sp>
+        <p:nvSpPr>
+          <p:cNvPr id="12" name="TextBox 4">
+            <a:extLst>
+              <a:ext uri="{FF2B5EF4-FFF2-40B4-BE49-F238E27FC236}">
+                <a16:creationId xmlns:a16="http://schemas.microsoft.com/office/drawing/2014/main" id="{4A76B166-A6D5-469C-F531-ED5A7944BF0D}"/>
+              </a:ext>
+            </a:extLst>
+          </p:cNvPr>
+          <p:cNvSpPr txBox="1"/>
+          <p:nvPr/>
+        </p:nvSpPr>
+        <p:spPr>
+          <a:xfrm>
+            <a:off x="2130275" y="4886708"/>
+            <a:ext cx="2863127" cy="1144929"/>
+          </a:xfrm>
+          <a:prstGeom prst="rect">
+            <a:avLst/>
+          </a:prstGeom>
+          <a:noFill/>
+        </p:spPr>
+        <p:txBody>
+          <a:bodyPr rot="0" spcFirstLastPara="0" vert="horz" wrap="square" lIns="91440" tIns="45720" rIns="91440" bIns="45720" numCol="1" spcCol="0" rtlCol="0" fromWordArt="0" anchor="t" anchorCtr="0" forceAA="0" compatLnSpc="1">
             <a:prstTxWarp prst="textNoShape">
               <a:avLst/>
             </a:prstTxWarp>
             <a:spAutoFit/>
           </a:bodyPr>
-          <a:lstStyle/>
+          <a:lstStyle>
+            <a:defPPr>
+              <a:defRPr lang="en-US"/>
+            </a:defPPr>
+            <a:lvl1pPr marL="0" algn="l" defTabSz="457200" rtl="0" eaLnBrk="1" latinLnBrk="0" hangingPunct="1">
+              <a:defRPr sz="1800" kern="1200">
+                <a:solidFill>
+                  <a:schemeClr val="tx1"/>
+                </a:solidFill>
+                <a:latin typeface="+mn-lt"/>
+                <a:ea typeface="+mn-ea"/>
+                <a:cs typeface="+mn-cs"/>
+              </a:defRPr>
+            </a:lvl1pPr>
+            <a:lvl2pPr marL="457200" algn="l" defTabSz="457200" rtl="0" eaLnBrk="1" latinLnBrk="0" hangingPunct="1">
+              <a:defRPr sz="1800" kern="1200">
+                <a:solidFill>
+                  <a:schemeClr val="tx1"/>
+                </a:solidFill>
+                <a:latin typeface="+mn-lt"/>
+                <a:ea typeface="+mn-ea"/>
+                <a:cs typeface="+mn-cs"/>
+              </a:defRPr>
+            </a:lvl2pPr>
+            <a:lvl3pPr marL="914400" algn="l" defTabSz="457200" rtl="0" eaLnBrk="1" latinLnBrk="0" hangingPunct="1">
+              <a:defRPr sz="1800" kern="1200">
+                <a:solidFill>
+                  <a:schemeClr val="tx1"/>
+                </a:solidFill>
+                <a:latin typeface="+mn-lt"/>
+                <a:ea typeface="+mn-ea"/>
+                <a:cs typeface="+mn-cs"/>
+              </a:defRPr>
+            </a:lvl3pPr>
+            <a:lvl4pPr marL="1371600" algn="l" defTabSz="457200" rtl="0" eaLnBrk="1" latinLnBrk="0" hangingPunct="1">
+              <a:defRPr sz="1800" kern="1200">
+                <a:solidFill>
+                  <a:schemeClr val="tx1"/>
+                </a:solidFill>
+                <a:latin typeface="+mn-lt"/>
+                <a:ea typeface="+mn-ea"/>
+                <a:cs typeface="+mn-cs"/>
+              </a:defRPr>
+            </a:lvl4pPr>
+            <a:lvl5pPr marL="1828800" algn="l" defTabSz="457200" rtl="0" eaLnBrk="1" latinLnBrk="0" hangingPunct="1">
+              <a:defRPr sz="1800" kern="1200">
+                <a:solidFill>
+                  <a:schemeClr val="tx1"/>
+                </a:solidFill>
+                <a:latin typeface="+mn-lt"/>
+                <a:ea typeface="+mn-ea"/>
+                <a:cs typeface="+mn-cs"/>
+              </a:defRPr>
+            </a:lvl5pPr>
+            <a:lvl6pPr marL="2286000" algn="l" defTabSz="457200" rtl="0" eaLnBrk="1" latinLnBrk="0" hangingPunct="1">
+              <a:defRPr sz="1800" kern="1200">
+                <a:solidFill>
+                  <a:schemeClr val="tx1"/>
+                </a:solidFill>
+                <a:latin typeface="+mn-lt"/>
+                <a:ea typeface="+mn-ea"/>
+                <a:cs typeface="+mn-cs"/>
+              </a:defRPr>
+            </a:lvl6pPr>
+            <a:lvl7pPr marL="2743200" algn="l" defTabSz="457200" rtl="0" eaLnBrk="1" latinLnBrk="0" hangingPunct="1">
+              <a:defRPr sz="1800" kern="1200">
+                <a:solidFill>
+                  <a:schemeClr val="tx1"/>
+                </a:solidFill>
+                <a:latin typeface="+mn-lt"/>
+                <a:ea typeface="+mn-ea"/>
+                <a:cs typeface="+mn-cs"/>
+              </a:defRPr>
+            </a:lvl7pPr>
+            <a:lvl8pPr marL="3200400" algn="l" defTabSz="457200" rtl="0" eaLnBrk="1" latinLnBrk="0" hangingPunct="1">
+              <a:defRPr sz="1800" kern="1200">
+                <a:solidFill>
+                  <a:schemeClr val="tx1"/>
+                </a:solidFill>
+                <a:latin typeface="+mn-lt"/>
+                <a:ea typeface="+mn-ea"/>
+                <a:cs typeface="+mn-cs"/>
+              </a:defRPr>
+            </a:lvl8pPr>
+            <a:lvl9pPr marL="3657600" algn="l" defTabSz="457200" rtl="0" eaLnBrk="1" latinLnBrk="0" hangingPunct="1">
+              <a:defRPr sz="1800" kern="1200">
+                <a:solidFill>
+                  <a:schemeClr val="tx1"/>
+                </a:solidFill>
+                <a:latin typeface="+mn-lt"/>
+                <a:ea typeface="+mn-ea"/>
+                <a:cs typeface="+mn-cs"/>
+              </a:defRPr>
+            </a:lvl9pPr>
+          </a:lstStyle>
           <a:p>
             <a:pPr>
               <a:lnSpc>
@@ -6624,13 +6450,22 @@
               </a:spcBef>
             </a:pPr>
             <a:r>
+              <a:rPr lang="en-US" sz="1400" dirty="0">
+                <a:highlight>
+                  <a:srgbClr val="FFFF00"/>
+                </a:highlight>
+                <a:latin typeface="Perpetua"/>
+              </a:rPr>
+              <a:t>Heat map of property with basemap and numbers – drag and crop image to ensure </a:t>
+            </a:r>
+            <a:r>
               <a:rPr lang="en-US" sz="1400">
                 <a:highlight>
                   <a:srgbClr val="FFFF00"/>
                 </a:highlight>
                 <a:latin typeface="Perpetua"/>
               </a:rPr>
-              <a:t>Heat map of property (no basemap)</a:t>
+              <a:t>that front street, backyard, and key are all visible</a:t>
             </a:r>
             <a:endParaRPr lang="en-US" sz="1400">
               <a:latin typeface="Perpetua"/>
@@ -6652,11 +6487,6 @@
   <p:clrMapOvr>
     <a:masterClrMapping/>
   </p:clrMapOvr>
-  <p:extLst>
-    <p:ext uri="{6950BFC3-D8DA-4A85-94F7-54DA5524770B}">
-      <p188:commentRel xmlns:p188="http://schemas.microsoft.com/office/powerpoint/2018/8/main" r:id="rId2"/>
-    </p:ext>
-  </p:extLst>
 </p:sld>
 </file>
 
@@ -6704,44 +6534,11 @@
           <a:bodyPr/>
           <a:lstStyle/>
           <a:p>
-            <a:fld id="{002D99DD-8857-4184-A278-3A7D828E7638}" type="datetime1">
+            <a:fld id="{BEFA50D7-04D0-42EF-A70B-2DCF93817190}" type="datetime1">
               <a:rPr lang="en-US" smtClean="0"/>
-              <a:t>4/8/2026</a:t>
+              <a:t>5/25/2026</a:t>
             </a:fld>
             <a:endParaRPr lang="en-US"/>
-          </a:p>
-        </p:txBody>
-      </p:sp>
-      <p:sp>
-        <p:nvSpPr>
-          <p:cNvPr id="10" name="Slide Number Placeholder 9">
-            <a:extLst>
-              <a:ext uri="{FF2B5EF4-FFF2-40B4-BE49-F238E27FC236}">
-                <a16:creationId xmlns:a16="http://schemas.microsoft.com/office/drawing/2014/main" id="{8558B679-A7CF-2249-2865-90C611E8A8C5}"/>
-              </a:ext>
-            </a:extLst>
-          </p:cNvPr>
-          <p:cNvSpPr>
-            <a:spLocks noGrp="1"/>
-          </p:cNvSpPr>
-          <p:nvPr>
-            <p:ph type="sldNum" sz="quarter" idx="12"/>
-          </p:nvPr>
-        </p:nvSpPr>
-        <p:spPr/>
-        <p:txBody>
-          <a:bodyPr/>
-          <a:lstStyle/>
-          <a:p>
-            <a:fld id="{AF85498A-A7D2-4202-8B58-6C83C98E0B39}" type="slidenum">
-              <a:rPr lang="en-US" sz="1000" dirty="0" smtClean="0">
-                <a:latin typeface="Aptos"/>
-              </a:rPr>
-              <a:t>4</a:t>
-            </a:fld>
-            <a:endParaRPr lang="en-US" sz="1000">
-              <a:latin typeface="Aptos"/>
-            </a:endParaRPr>
           </a:p>
         </p:txBody>
       </p:sp>
@@ -6936,7 +6733,7 @@
         <p:spPr>
           <a:xfrm>
             <a:off x="1668544" y="1552941"/>
-            <a:ext cx="4776466" cy="1554920"/>
+            <a:ext cx="4776466" cy="580698"/>
           </a:xfrm>
           <a:prstGeom prst="rect">
             <a:avLst/>
@@ -7118,15 +6915,15 @@
               <a:buNone/>
             </a:pPr>
             <a:r>
-              <a:rPr lang="en-US" sz="1400" b="1">
+              <a:rPr lang="en-US" sz="1600" b="1">
                 <a:latin typeface="Perpetua"/>
                 <a:ea typeface="Calibri"/>
                 <a:cs typeface="Calibri"/>
               </a:rPr>
-              <a:t>Average lead concentration in your soil</a:t>
-            </a:r>
-            <a:r>
-              <a:rPr lang="en-US" sz="1400">
+              <a:t>Total lead concentrations in your soil</a:t>
+            </a:r>
+            <a:r>
+              <a:rPr lang="en-US" sz="1600">
                 <a:latin typeface="Perpetua"/>
                 <a:ea typeface="Calibri"/>
                 <a:cs typeface="Calibri"/>
@@ -7134,73 +6931,17 @@
               <a:t> </a:t>
             </a:r>
             <a:br>
-              <a:rPr lang="en-US" sz="1400">
+              <a:rPr lang="en-US" sz="1600">
                 <a:latin typeface="Perpetua"/>
                 <a:ea typeface="Calibri"/>
                 <a:cs typeface="Calibri"/>
               </a:rPr>
             </a:br>
-            <a:r>
-              <a:rPr lang="en-US" sz="1400">
-                <a:latin typeface="Perpetua"/>
-                <a:ea typeface="Calibri"/>
-                <a:cs typeface="Calibri"/>
-              </a:rPr>
-              <a:t>Backyard: </a:t>
-            </a:r>
-            <a:r>
-              <a:rPr lang="en-US" sz="1400">
-                <a:highlight>
-                  <a:srgbClr val="FFFF00"/>
-                </a:highlight>
-                <a:latin typeface="Perpetua"/>
-                <a:ea typeface="Calibri"/>
-                <a:cs typeface="Calibri"/>
-              </a:rPr>
-              <a:t>[###]</a:t>
-            </a:r>
-            <a:r>
-              <a:rPr lang="en-US" sz="1400">
-                <a:latin typeface="Perpetua"/>
-                <a:ea typeface="Calibri"/>
-                <a:cs typeface="Calibri"/>
-              </a:rPr>
-              <a:t> PPM   </a:t>
-            </a:r>
-            <a:br>
-              <a:rPr lang="en-US" sz="1400">
-                <a:latin typeface="Perpetua"/>
-                <a:ea typeface="Calibri"/>
-                <a:cs typeface="Calibri"/>
-              </a:rPr>
-            </a:br>
-            <a:r>
-              <a:rPr lang="en-US" sz="1400">
-                <a:latin typeface="Perpetua"/>
-                <a:ea typeface="Calibri"/>
-                <a:cs typeface="Calibri"/>
-              </a:rPr>
-              <a:t>Front yard: </a:t>
-            </a:r>
-            <a:r>
-              <a:rPr lang="en-US" sz="1400">
-                <a:highlight>
-                  <a:srgbClr val="FFFF00"/>
-                </a:highlight>
-                <a:latin typeface="Perpetua"/>
-                <a:ea typeface="Calibri"/>
-                <a:cs typeface="Calibri"/>
-              </a:rPr>
-              <a:t>[###]</a:t>
-            </a:r>
-            <a:r>
-              <a:rPr lang="en-US" sz="1400">
-                <a:latin typeface="Perpetua"/>
-                <a:ea typeface="Calibri"/>
-                <a:cs typeface="Calibri"/>
-              </a:rPr>
-              <a:t> PPM   </a:t>
-            </a:r>
+            <a:endParaRPr lang="en-US" sz="1600">
+              <a:latin typeface="Perpetua"/>
+              <a:ea typeface="Calibri"/>
+              <a:cs typeface="Calibri"/>
+            </a:endParaRPr>
           </a:p>
         </p:txBody>
       </p:sp>
@@ -7410,704 +7151,874 @@
           </a:p>
         </p:txBody>
       </p:sp>
-      <p:sp>
-        <p:nvSpPr>
-          <p:cNvPr id="5" name="TextBox 4">
+      <p:graphicFrame>
+        <p:nvGraphicFramePr>
+          <p:cNvPr id="2" name="Table 1">
             <a:extLst>
               <a:ext uri="{FF2B5EF4-FFF2-40B4-BE49-F238E27FC236}">
-                <a16:creationId xmlns:a16="http://schemas.microsoft.com/office/drawing/2014/main" id="{4A76B166-A6D5-469C-F531-ED5A7944BF0D}"/>
+                <a16:creationId xmlns:a16="http://schemas.microsoft.com/office/drawing/2014/main" id="{47CDCC5E-9C15-E3F5-3F43-41BC49894F59}"/>
               </a:ext>
             </a:extLst>
           </p:cNvPr>
-          <p:cNvSpPr txBox="1"/>
-          <p:nvPr/>
-        </p:nvSpPr>
-        <p:spPr>
-          <a:xfrm>
-            <a:off x="1985419" y="2980532"/>
-            <a:ext cx="2863127" cy="563231"/>
-          </a:xfrm>
-          <a:prstGeom prst="rect">
-            <a:avLst/>
-          </a:prstGeom>
-          <a:noFill/>
-        </p:spPr>
-        <p:txBody>
-          <a:bodyPr rot="0" spcFirstLastPara="0" vertOverflow="overflow" horzOverflow="overflow" vert="horz" wrap="square" lIns="91440" tIns="45720" rIns="91440" bIns="45720" numCol="1" spcCol="0" rtlCol="0" fromWordArt="0" anchor="t" anchorCtr="0" forceAA="0" compatLnSpc="1">
-            <a:prstTxWarp prst="textNoShape">
-              <a:avLst/>
-            </a:prstTxWarp>
-            <a:spAutoFit/>
-          </a:bodyPr>
-          <a:lstStyle/>
-          <a:p>
-            <a:pPr>
-              <a:lnSpc>
-                <a:spcPct val="90000"/>
-              </a:lnSpc>
-              <a:spcBef>
-                <a:spcPts val="850"/>
-              </a:spcBef>
-            </a:pPr>
-            <a:r>
-              <a:rPr lang="en-US" sz="1400">
-                <a:highlight>
-                  <a:srgbClr val="FFFF00"/>
-                </a:highlight>
-                <a:latin typeface="Perpetua"/>
-              </a:rPr>
-              <a:t>Heat map of property with basemap</a:t>
-            </a:r>
-            <a:endParaRPr lang="en-US" sz="1400">
-              <a:latin typeface="Perpetua"/>
-            </a:endParaRPr>
-          </a:p>
-          <a:p>
-            <a:pPr algn="ctr"/>
-            <a:endParaRPr lang="en-US"/>
-          </a:p>
-        </p:txBody>
-      </p:sp>
-    </p:spTree>
-    <p:extLst>
-      <p:ext uri="{BB962C8B-B14F-4D97-AF65-F5344CB8AC3E}">
-        <p14:creationId xmlns:p14="http://schemas.microsoft.com/office/powerpoint/2010/main" val="2461842306"/>
-      </p:ext>
-    </p:extLst>
-  </p:cSld>
-  <p:clrMapOvr>
-    <a:masterClrMapping/>
-  </p:clrMapOvr>
-  <p:extLst>
-    <p:ext uri="{6950BFC3-D8DA-4A85-94F7-54DA5524770B}">
-      <p188:commentRel xmlns:p188="http://schemas.microsoft.com/office/powerpoint/2018/8/main" r:id="rId2"/>
-    </p:ext>
-  </p:extLst>
-</p:sld>
-</file>
-
-<file path=ppt/slides/slide5.xml><?xml version="1.0" encoding="utf-8"?>
-<p:sld xmlns:a="http://schemas.openxmlformats.org/drawingml/2006/main" xmlns:r="http://schemas.openxmlformats.org/officeDocument/2006/relationships" xmlns:p="http://schemas.openxmlformats.org/presentationml/2006/main">
-  <p:cSld>
-    <p:spTree>
-      <p:nvGrpSpPr>
-        <p:cNvPr id="1" name=""/>
-        <p:cNvGrpSpPr/>
-        <p:nvPr/>
-      </p:nvGrpSpPr>
-      <p:grpSpPr>
-        <a:xfrm>
-          <a:off x="0" y="0"/>
-          <a:ext cx="0" cy="0"/>
-          <a:chOff x="0" y="0"/>
-          <a:chExt cx="0" cy="0"/>
-        </a:xfrm>
-      </p:grpSpPr>
-      <p:pic>
-        <p:nvPicPr>
-          <p:cNvPr id="7" name="Content Placeholder 6">
+          <p:cNvGraphicFramePr>
+            <a:graphicFrameLocks noGrp="1"/>
+          </p:cNvGraphicFramePr>
+          <p:nvPr>
+            <p:extLst>
+              <p:ext uri="{D42A27DB-BD31-4B8C-83A1-F6EECF244321}">
+                <p14:modId xmlns:p14="http://schemas.microsoft.com/office/powerpoint/2010/main" val="1572543892"/>
+              </p:ext>
+            </p:extLst>
+          </p:nvPr>
+        </p:nvGraphicFramePr>
+        <p:xfrm>
+          <a:off x="1782251" y="1863530"/>
+          <a:ext cx="4549052" cy="914400"/>
+        </p:xfrm>
+        <a:graphic>
+          <a:graphicData uri="http://schemas.openxmlformats.org/drawingml/2006/table">
+            <a:tbl>
+              <a:tblPr firstRow="1" bandRow="1">
+                <a:tableStyleId>{5C22544A-7EE6-4342-B048-85BDC9FD1C3A}</a:tableStyleId>
+              </a:tblPr>
+              <a:tblGrid>
+                <a:gridCol w="1137263">
+                  <a:extLst>
+                    <a:ext uri="{9D8B030D-6E8A-4147-A177-3AD203B41FA5}">
+                      <a16:colId xmlns:a16="http://schemas.microsoft.com/office/drawing/2014/main" val="3308090858"/>
+                    </a:ext>
+                  </a:extLst>
+                </a:gridCol>
+                <a:gridCol w="1137263">
+                  <a:extLst>
+                    <a:ext uri="{9D8B030D-6E8A-4147-A177-3AD203B41FA5}">
+                      <a16:colId xmlns:a16="http://schemas.microsoft.com/office/drawing/2014/main" val="447881686"/>
+                    </a:ext>
+                  </a:extLst>
+                </a:gridCol>
+                <a:gridCol w="1137263">
+                  <a:extLst>
+                    <a:ext uri="{9D8B030D-6E8A-4147-A177-3AD203B41FA5}">
+                      <a16:colId xmlns:a16="http://schemas.microsoft.com/office/drawing/2014/main" val="588366292"/>
+                    </a:ext>
+                  </a:extLst>
+                </a:gridCol>
+                <a:gridCol w="1137263">
+                  <a:extLst>
+                    <a:ext uri="{9D8B030D-6E8A-4147-A177-3AD203B41FA5}">
+                      <a16:colId xmlns:a16="http://schemas.microsoft.com/office/drawing/2014/main" val="706587062"/>
+                    </a:ext>
+                  </a:extLst>
+                </a:gridCol>
+              </a:tblGrid>
+              <a:tr h="280471">
+                <a:tc>
+                  <a:txBody>
+                    <a:bodyPr/>
+                    <a:lstStyle/>
+                    <a:p>
+                      <a:endParaRPr lang="en-US" sz="1400">
+                        <a:solidFill>
+                          <a:schemeClr val="tx1"/>
+                        </a:solidFill>
+                        <a:latin typeface="Perpetua"/>
+                      </a:endParaRPr>
+                    </a:p>
+                  </a:txBody>
+                  <a:tcPr>
+                    <a:lnL w="3175">
+                      <a:solidFill>
+                        <a:schemeClr val="tx1"/>
+                      </a:solidFill>
+                    </a:lnL>
+                    <a:lnR w="3175">
+                      <a:solidFill>
+                        <a:schemeClr val="tx1"/>
+                      </a:solidFill>
+                    </a:lnR>
+                    <a:lnT w="3175">
+                      <a:solidFill>
+                        <a:schemeClr val="tx1"/>
+                      </a:solidFill>
+                    </a:lnT>
+                    <a:lnB w="3175">
+                      <a:solidFill>
+                        <a:schemeClr val="tx1"/>
+                      </a:solidFill>
+                    </a:lnB>
+                    <a:solidFill>
+                      <a:schemeClr val="bg1">
+                        <a:lumMod val="85000"/>
+                      </a:schemeClr>
+                    </a:solidFill>
+                  </a:tcPr>
+                </a:tc>
+                <a:tc>
+                  <a:txBody>
+                    <a:bodyPr/>
+                    <a:lstStyle/>
+                    <a:p>
+                      <a:r>
+                        <a:rPr lang="en-US" sz="1400">
+                          <a:solidFill>
+                            <a:schemeClr val="tx1"/>
+                          </a:solidFill>
+                          <a:latin typeface="Perpetua"/>
+                        </a:rPr>
+                        <a:t>Highest</a:t>
+                      </a:r>
+                    </a:p>
+                  </a:txBody>
+                  <a:tcPr>
+                    <a:lnL w="3175">
+                      <a:solidFill>
+                        <a:schemeClr val="tx1"/>
+                      </a:solidFill>
+                    </a:lnL>
+                    <a:lnR w="3175">
+                      <a:solidFill>
+                        <a:schemeClr val="tx1"/>
+                      </a:solidFill>
+                    </a:lnR>
+                    <a:lnT w="3175">
+                      <a:solidFill>
+                        <a:schemeClr val="tx1"/>
+                      </a:solidFill>
+                    </a:lnT>
+                    <a:lnB w="3175">
+                      <a:solidFill>
+                        <a:schemeClr val="tx1"/>
+                      </a:solidFill>
+                    </a:lnB>
+                    <a:solidFill>
+                      <a:schemeClr val="bg1">
+                        <a:lumMod val="85000"/>
+                      </a:schemeClr>
+                    </a:solidFill>
+                  </a:tcPr>
+                </a:tc>
+                <a:tc>
+                  <a:txBody>
+                    <a:bodyPr/>
+                    <a:lstStyle/>
+                    <a:p>
+                      <a:r>
+                        <a:rPr lang="en-US" sz="1400">
+                          <a:solidFill>
+                            <a:schemeClr val="tx1"/>
+                          </a:solidFill>
+                          <a:latin typeface="Perpetua"/>
+                        </a:rPr>
+                        <a:t>Lowest</a:t>
+                      </a:r>
+                    </a:p>
+                  </a:txBody>
+                  <a:tcPr>
+                    <a:lnL w="3175">
+                      <a:solidFill>
+                        <a:schemeClr val="tx1"/>
+                      </a:solidFill>
+                    </a:lnL>
+                    <a:lnR w="3175" cap="flat" cmpd="sng" algn="ctr">
+                      <a:solidFill>
+                        <a:schemeClr val="tx1"/>
+                      </a:solidFill>
+                      <a:prstDash val="solid"/>
+                      <a:round/>
+                      <a:headEnd type="none" w="med" len="med"/>
+                      <a:tailEnd type="none" w="med" len="med"/>
+                    </a:lnR>
+                    <a:lnT w="3175">
+                      <a:solidFill>
+                        <a:schemeClr val="tx1"/>
+                      </a:solidFill>
+                    </a:lnT>
+                    <a:lnB w="3175">
+                      <a:solidFill>
+                        <a:schemeClr val="tx1"/>
+                      </a:solidFill>
+                    </a:lnB>
+                    <a:solidFill>
+                      <a:schemeClr val="bg1">
+                        <a:lumMod val="85000"/>
+                      </a:schemeClr>
+                    </a:solidFill>
+                  </a:tcPr>
+                </a:tc>
+                <a:tc>
+                  <a:txBody>
+                    <a:bodyPr/>
+                    <a:lstStyle/>
+                    <a:p>
+                      <a:r>
+                        <a:rPr lang="en-US" sz="1400">
+                          <a:solidFill>
+                            <a:schemeClr val="tx1"/>
+                          </a:solidFill>
+                          <a:latin typeface="Perpetua"/>
+                        </a:rPr>
+                        <a:t>Average</a:t>
+                      </a:r>
+                    </a:p>
+                  </a:txBody>
+                  <a:tcPr>
+                    <a:lnL w="3175">
+                      <a:solidFill>
+                        <a:schemeClr val="tx1"/>
+                      </a:solidFill>
+                    </a:lnL>
+                    <a:lnR w="3175">
+                      <a:solidFill>
+                        <a:schemeClr val="tx1"/>
+                      </a:solidFill>
+                    </a:lnR>
+                    <a:lnT w="3175">
+                      <a:solidFill>
+                        <a:schemeClr val="tx1"/>
+                      </a:solidFill>
+                    </a:lnT>
+                    <a:lnB w="3175" cap="flat" cmpd="sng" algn="ctr">
+                      <a:solidFill>
+                        <a:schemeClr val="tx1"/>
+                      </a:solidFill>
+                      <a:prstDash val="solid"/>
+                      <a:round/>
+                      <a:headEnd type="none" w="med" len="med"/>
+                      <a:tailEnd type="none" w="med" len="med"/>
+                    </a:lnB>
+                    <a:solidFill>
+                      <a:schemeClr val="bg1">
+                        <a:lumMod val="85000"/>
+                      </a:schemeClr>
+                    </a:solidFill>
+                  </a:tcPr>
+                </a:tc>
+                <a:extLst>
+                  <a:ext uri="{0D108BD9-81ED-4DB2-BD59-A6C34878D82A}">
+                    <a16:rowId xmlns:a16="http://schemas.microsoft.com/office/drawing/2014/main" val="609639452"/>
+                  </a:ext>
+                </a:extLst>
+              </a:tr>
+              <a:tr h="271456">
+                <a:tc>
+                  <a:txBody>
+                    <a:bodyPr/>
+                    <a:lstStyle/>
+                    <a:p>
+                      <a:r>
+                        <a:rPr lang="en-US" sz="1400" b="1">
+                          <a:solidFill>
+                            <a:schemeClr val="tx1"/>
+                          </a:solidFill>
+                          <a:latin typeface="Perpetua"/>
+                        </a:rPr>
+                        <a:t>Backyard</a:t>
+                      </a:r>
+                    </a:p>
+                  </a:txBody>
+                  <a:tcPr>
+                    <a:lnL w="3175">
+                      <a:solidFill>
+                        <a:schemeClr val="tx1"/>
+                      </a:solidFill>
+                    </a:lnL>
+                    <a:lnR w="3175">
+                      <a:solidFill>
+                        <a:schemeClr val="tx1"/>
+                      </a:solidFill>
+                    </a:lnR>
+                    <a:lnT w="3175">
+                      <a:solidFill>
+                        <a:schemeClr val="tx1"/>
+                      </a:solidFill>
+                    </a:lnT>
+                    <a:lnB w="3175">
+                      <a:solidFill>
+                        <a:schemeClr val="tx1"/>
+                      </a:solidFill>
+                    </a:lnB>
+                    <a:solidFill>
+                      <a:schemeClr val="bg1">
+                        <a:lumMod val="85000"/>
+                      </a:schemeClr>
+                    </a:solidFill>
+                  </a:tcPr>
+                </a:tc>
+                <a:tc>
+                  <a:txBody>
+                    <a:bodyPr/>
+                    <a:lstStyle/>
+                    <a:p>
+                      <a:r>
+                        <a:rPr lang="en-US" sz="1400">
+                          <a:highlight>
+                            <a:srgbClr val="FFFF00"/>
+                          </a:highlight>
+                          <a:latin typeface="Perpetua"/>
+                          <a:ea typeface="Calibri"/>
+                          <a:cs typeface="Calibri"/>
+                        </a:rPr>
+                        <a:t>###</a:t>
+                      </a:r>
+                      <a:r>
+                        <a:rPr lang="en-US" sz="1400">
+                          <a:latin typeface="Perpetua"/>
+                          <a:ea typeface="Calibri"/>
+                          <a:cs typeface="Calibri"/>
+                        </a:rPr>
+                        <a:t> </a:t>
+                      </a:r>
+                      <a:r>
+                        <a:rPr lang="en-US" sz="1400">
+                          <a:solidFill>
+                            <a:schemeClr val="tx1"/>
+                          </a:solidFill>
+                          <a:latin typeface="Perpetua"/>
+                          <a:ea typeface="Calibri"/>
+                          <a:cs typeface="Calibri"/>
+                        </a:rPr>
+                        <a:t>p</a:t>
+                      </a:r>
+                      <a:r>
+                        <a:rPr lang="en-US" sz="1400">
+                          <a:solidFill>
+                            <a:schemeClr val="tx1"/>
+                          </a:solidFill>
+                          <a:latin typeface="Perpetua"/>
+                        </a:rPr>
+                        <a:t>pm</a:t>
+                      </a:r>
+                    </a:p>
+                  </a:txBody>
+                  <a:tcPr>
+                    <a:lnL w="3175">
+                      <a:solidFill>
+                        <a:schemeClr val="tx1"/>
+                      </a:solidFill>
+                    </a:lnL>
+                    <a:lnR w="3175">
+                      <a:solidFill>
+                        <a:schemeClr val="tx1"/>
+                      </a:solidFill>
+                    </a:lnR>
+                    <a:lnT w="3175">
+                      <a:solidFill>
+                        <a:schemeClr val="tx1"/>
+                      </a:solidFill>
+                    </a:lnT>
+                    <a:lnB w="3175">
+                      <a:solidFill>
+                        <a:schemeClr val="tx1"/>
+                      </a:solidFill>
+                    </a:lnB>
+                    <a:noFill/>
+                  </a:tcPr>
+                </a:tc>
+                <a:tc>
+                  <a:txBody>
+                    <a:bodyPr/>
+                    <a:lstStyle/>
+                    <a:p>
+                      <a:r>
+                        <a:rPr lang="en-US" sz="1400">
+                          <a:highlight>
+                            <a:srgbClr val="FFFF00"/>
+                          </a:highlight>
+                          <a:latin typeface="Perpetua"/>
+                          <a:ea typeface="Calibri"/>
+                          <a:cs typeface="Calibri"/>
+                        </a:rPr>
+                        <a:t>###</a:t>
+                      </a:r>
+                      <a:r>
+                        <a:rPr lang="en-US" sz="1400">
+                          <a:latin typeface="Perpetua"/>
+                          <a:ea typeface="Calibri"/>
+                          <a:cs typeface="Calibri"/>
+                        </a:rPr>
+                        <a:t> </a:t>
+                      </a:r>
+                      <a:r>
+                        <a:rPr lang="en-US" sz="1400">
+                          <a:solidFill>
+                            <a:schemeClr val="tx1"/>
+                          </a:solidFill>
+                          <a:latin typeface="Perpetua"/>
+                          <a:ea typeface="Calibri"/>
+                          <a:cs typeface="Calibri"/>
+                        </a:rPr>
+                        <a:t>p</a:t>
+                      </a:r>
+                      <a:r>
+                        <a:rPr lang="en-US" sz="1400">
+                          <a:solidFill>
+                            <a:schemeClr val="tx1"/>
+                          </a:solidFill>
+                          <a:latin typeface="Perpetua"/>
+                        </a:rPr>
+                        <a:t>pm</a:t>
+                      </a:r>
+                    </a:p>
+                  </a:txBody>
+                  <a:tcPr>
+                    <a:lnL w="3175">
+                      <a:solidFill>
+                        <a:schemeClr val="tx1"/>
+                      </a:solidFill>
+                    </a:lnL>
+                    <a:lnR w="3175" cap="flat" cmpd="sng" algn="ctr">
+                      <a:solidFill>
+                        <a:schemeClr val="tx1"/>
+                      </a:solidFill>
+                      <a:prstDash val="solid"/>
+                      <a:round/>
+                      <a:headEnd type="none" w="med" len="med"/>
+                      <a:tailEnd type="none" w="med" len="med"/>
+                    </a:lnR>
+                    <a:lnT w="3175">
+                      <a:solidFill>
+                        <a:schemeClr val="tx1"/>
+                      </a:solidFill>
+                    </a:lnT>
+                    <a:lnB w="3175">
+                      <a:solidFill>
+                        <a:schemeClr val="tx1"/>
+                      </a:solidFill>
+                    </a:lnB>
+                    <a:noFill/>
+                  </a:tcPr>
+                </a:tc>
+                <a:tc>
+                  <a:txBody>
+                    <a:bodyPr/>
+                    <a:lstStyle/>
+                    <a:p>
+                      <a:pPr marL="0" marR="0" lvl="0" indent="0" algn="l" defTabSz="777240" rtl="0" eaLnBrk="1" fontAlgn="auto" latinLnBrk="0" hangingPunct="1">
+                        <a:lnSpc>
+                          <a:spcPct val="100000"/>
+                        </a:lnSpc>
+                        <a:spcBef>
+                          <a:spcPts val="0"/>
+                        </a:spcBef>
+                        <a:spcAft>
+                          <a:spcPts val="0"/>
+                        </a:spcAft>
+                        <a:buClrTx/>
+                        <a:buSzTx/>
+                        <a:buFontTx/>
+                        <a:buNone/>
+                        <a:tabLst/>
+                        <a:defRPr/>
+                      </a:pPr>
+                      <a:r>
+                        <a:rPr lang="en-US" sz="1400">
+                          <a:highlight>
+                            <a:srgbClr val="FFFF00"/>
+                          </a:highlight>
+                          <a:latin typeface="Perpetua"/>
+                          <a:ea typeface="Calibri"/>
+                          <a:cs typeface="Calibri"/>
+                        </a:rPr>
+                        <a:t>###</a:t>
+                      </a:r>
+                      <a:r>
+                        <a:rPr lang="en-US" sz="1400">
+                          <a:latin typeface="Perpetua"/>
+                          <a:ea typeface="Calibri"/>
+                          <a:cs typeface="Calibri"/>
+                        </a:rPr>
+                        <a:t> </a:t>
+                      </a:r>
+                      <a:r>
+                        <a:rPr lang="en-US" sz="1400">
+                          <a:solidFill>
+                            <a:schemeClr val="tx1"/>
+                          </a:solidFill>
+                          <a:latin typeface="Perpetua"/>
+                          <a:ea typeface="Calibri"/>
+                          <a:cs typeface="Calibri"/>
+                        </a:rPr>
+                        <a:t>p</a:t>
+                      </a:r>
+                      <a:r>
+                        <a:rPr lang="en-US" sz="1400">
+                          <a:solidFill>
+                            <a:schemeClr val="tx1"/>
+                          </a:solidFill>
+                          <a:latin typeface="Perpetua"/>
+                        </a:rPr>
+                        <a:t>pm</a:t>
+                      </a:r>
+                    </a:p>
+                  </a:txBody>
+                  <a:tcPr>
+                    <a:lnL w="3175">
+                      <a:solidFill>
+                        <a:schemeClr val="tx1"/>
+                      </a:solidFill>
+                    </a:lnL>
+                    <a:lnR w="3175">
+                      <a:solidFill>
+                        <a:schemeClr val="tx1"/>
+                      </a:solidFill>
+                    </a:lnR>
+                    <a:lnT w="3175" cap="flat" cmpd="sng" algn="ctr">
+                      <a:solidFill>
+                        <a:schemeClr val="tx1"/>
+                      </a:solidFill>
+                      <a:prstDash val="solid"/>
+                      <a:round/>
+                      <a:headEnd type="none" w="med" len="med"/>
+                      <a:tailEnd type="none" w="med" len="med"/>
+                    </a:lnT>
+                    <a:lnB w="3175" cap="flat" cmpd="sng" algn="ctr">
+                      <a:solidFill>
+                        <a:schemeClr val="tx1"/>
+                      </a:solidFill>
+                      <a:prstDash val="solid"/>
+                      <a:round/>
+                      <a:headEnd type="none" w="med" len="med"/>
+                      <a:tailEnd type="none" w="med" len="med"/>
+                    </a:lnB>
+                    <a:noFill/>
+                  </a:tcPr>
+                </a:tc>
+                <a:extLst>
+                  <a:ext uri="{0D108BD9-81ED-4DB2-BD59-A6C34878D82A}">
+                    <a16:rowId xmlns:a16="http://schemas.microsoft.com/office/drawing/2014/main" val="2783529540"/>
+                  </a:ext>
+                </a:extLst>
+              </a:tr>
+              <a:tr h="271456">
+                <a:tc>
+                  <a:txBody>
+                    <a:bodyPr/>
+                    <a:lstStyle/>
+                    <a:p>
+                      <a:r>
+                        <a:rPr lang="en-US" sz="1400" b="1">
+                          <a:solidFill>
+                            <a:schemeClr val="tx1"/>
+                          </a:solidFill>
+                          <a:latin typeface="Perpetua"/>
+                        </a:rPr>
+                        <a:t>Front yard</a:t>
+                      </a:r>
+                    </a:p>
+                  </a:txBody>
+                  <a:tcPr>
+                    <a:lnL w="3175">
+                      <a:solidFill>
+                        <a:schemeClr val="tx1"/>
+                      </a:solidFill>
+                    </a:lnL>
+                    <a:lnR w="3175">
+                      <a:solidFill>
+                        <a:schemeClr val="tx1"/>
+                      </a:solidFill>
+                    </a:lnR>
+                    <a:lnT w="3175">
+                      <a:solidFill>
+                        <a:schemeClr val="tx1"/>
+                      </a:solidFill>
+                    </a:lnT>
+                    <a:lnB w="3175">
+                      <a:solidFill>
+                        <a:schemeClr val="tx1"/>
+                      </a:solidFill>
+                    </a:lnB>
+                    <a:solidFill>
+                      <a:schemeClr val="bg1">
+                        <a:lumMod val="85000"/>
+                      </a:schemeClr>
+                    </a:solidFill>
+                  </a:tcPr>
+                </a:tc>
+                <a:tc>
+                  <a:txBody>
+                    <a:bodyPr/>
+                    <a:lstStyle/>
+                    <a:p>
+                      <a:pPr marL="0" marR="0" lvl="0" indent="0" algn="l" defTabSz="777240" rtl="0" eaLnBrk="1" fontAlgn="auto" latinLnBrk="0" hangingPunct="1">
+                        <a:lnSpc>
+                          <a:spcPct val="100000"/>
+                        </a:lnSpc>
+                        <a:spcBef>
+                          <a:spcPts val="0"/>
+                        </a:spcBef>
+                        <a:spcAft>
+                          <a:spcPts val="0"/>
+                        </a:spcAft>
+                        <a:buClrTx/>
+                        <a:buSzTx/>
+                        <a:buFontTx/>
+                        <a:buNone/>
+                        <a:tabLst/>
+                        <a:defRPr/>
+                      </a:pPr>
+                      <a:r>
+                        <a:rPr lang="en-US" sz="1400">
+                          <a:highlight>
+                            <a:srgbClr val="FFFF00"/>
+                          </a:highlight>
+                          <a:latin typeface="Perpetua"/>
+                          <a:ea typeface="Calibri"/>
+                          <a:cs typeface="Calibri"/>
+                        </a:rPr>
+                        <a:t>###</a:t>
+                      </a:r>
+                      <a:r>
+                        <a:rPr lang="en-US" sz="1400">
+                          <a:latin typeface="Perpetua"/>
+                          <a:ea typeface="Calibri"/>
+                          <a:cs typeface="Calibri"/>
+                        </a:rPr>
+                        <a:t> </a:t>
+                      </a:r>
+                      <a:r>
+                        <a:rPr lang="en-US" sz="1400">
+                          <a:solidFill>
+                            <a:schemeClr val="tx1"/>
+                          </a:solidFill>
+                          <a:latin typeface="Perpetua"/>
+                          <a:ea typeface="Calibri"/>
+                          <a:cs typeface="Calibri"/>
+                        </a:rPr>
+                        <a:t>p</a:t>
+                      </a:r>
+                      <a:r>
+                        <a:rPr lang="en-US" sz="1400">
+                          <a:solidFill>
+                            <a:schemeClr val="tx1"/>
+                          </a:solidFill>
+                          <a:latin typeface="Perpetua"/>
+                        </a:rPr>
+                        <a:t>pm</a:t>
+                      </a:r>
+                    </a:p>
+                  </a:txBody>
+                  <a:tcPr>
+                    <a:lnL w="3175">
+                      <a:solidFill>
+                        <a:schemeClr val="tx1"/>
+                      </a:solidFill>
+                    </a:lnL>
+                    <a:lnR w="3175">
+                      <a:solidFill>
+                        <a:schemeClr val="tx1"/>
+                      </a:solidFill>
+                    </a:lnR>
+                    <a:lnT w="3175">
+                      <a:solidFill>
+                        <a:schemeClr val="tx1"/>
+                      </a:solidFill>
+                    </a:lnT>
+                    <a:lnB w="3175">
+                      <a:solidFill>
+                        <a:schemeClr val="tx1"/>
+                      </a:solidFill>
+                    </a:lnB>
+                    <a:noFill/>
+                  </a:tcPr>
+                </a:tc>
+                <a:tc>
+                  <a:txBody>
+                    <a:bodyPr/>
+                    <a:lstStyle/>
+                    <a:p>
+                      <a:pPr marL="0" marR="0" lvl="0" indent="0" algn="l" defTabSz="777240" rtl="0" eaLnBrk="1" fontAlgn="auto" latinLnBrk="0" hangingPunct="1">
+                        <a:lnSpc>
+                          <a:spcPct val="100000"/>
+                        </a:lnSpc>
+                        <a:spcBef>
+                          <a:spcPts val="0"/>
+                        </a:spcBef>
+                        <a:spcAft>
+                          <a:spcPts val="0"/>
+                        </a:spcAft>
+                        <a:buClrTx/>
+                        <a:buSzTx/>
+                        <a:buFontTx/>
+                        <a:buNone/>
+                        <a:tabLst/>
+                        <a:defRPr/>
+                      </a:pPr>
+                      <a:r>
+                        <a:rPr lang="en-US" sz="1400">
+                          <a:highlight>
+                            <a:srgbClr val="FFFF00"/>
+                          </a:highlight>
+                          <a:latin typeface="Perpetua"/>
+                          <a:ea typeface="Calibri"/>
+                          <a:cs typeface="Calibri"/>
+                        </a:rPr>
+                        <a:t>###</a:t>
+                      </a:r>
+                      <a:r>
+                        <a:rPr lang="en-US" sz="1400">
+                          <a:latin typeface="Perpetua"/>
+                          <a:ea typeface="Calibri"/>
+                          <a:cs typeface="Calibri"/>
+                        </a:rPr>
+                        <a:t> </a:t>
+                      </a:r>
+                      <a:r>
+                        <a:rPr lang="en-US" sz="1400">
+                          <a:solidFill>
+                            <a:schemeClr val="tx1"/>
+                          </a:solidFill>
+                          <a:latin typeface="Perpetua"/>
+                          <a:ea typeface="Calibri"/>
+                          <a:cs typeface="Calibri"/>
+                        </a:rPr>
+                        <a:t>p</a:t>
+                      </a:r>
+                      <a:r>
+                        <a:rPr lang="en-US" sz="1400">
+                          <a:solidFill>
+                            <a:schemeClr val="tx1"/>
+                          </a:solidFill>
+                          <a:latin typeface="Perpetua"/>
+                        </a:rPr>
+                        <a:t>pm</a:t>
+                      </a:r>
+                    </a:p>
+                  </a:txBody>
+                  <a:tcPr>
+                    <a:lnL w="3175">
+                      <a:solidFill>
+                        <a:schemeClr val="tx1"/>
+                      </a:solidFill>
+                    </a:lnL>
+                    <a:lnR w="3175" cap="flat" cmpd="sng" algn="ctr">
+                      <a:solidFill>
+                        <a:schemeClr val="tx1"/>
+                      </a:solidFill>
+                      <a:prstDash val="solid"/>
+                      <a:round/>
+                      <a:headEnd type="none" w="med" len="med"/>
+                      <a:tailEnd type="none" w="med" len="med"/>
+                    </a:lnR>
+                    <a:lnT w="3175">
+                      <a:solidFill>
+                        <a:schemeClr val="tx1"/>
+                      </a:solidFill>
+                    </a:lnT>
+                    <a:lnB w="3175">
+                      <a:solidFill>
+                        <a:schemeClr val="tx1"/>
+                      </a:solidFill>
+                    </a:lnB>
+                    <a:noFill/>
+                  </a:tcPr>
+                </a:tc>
+                <a:tc>
+                  <a:txBody>
+                    <a:bodyPr/>
+                    <a:lstStyle/>
+                    <a:p>
+                      <a:pPr marL="0" marR="0" lvl="0" indent="0" algn="l" defTabSz="777240" rtl="0" eaLnBrk="1" fontAlgn="auto" latinLnBrk="0" hangingPunct="1">
+                        <a:lnSpc>
+                          <a:spcPct val="100000"/>
+                        </a:lnSpc>
+                        <a:spcBef>
+                          <a:spcPts val="0"/>
+                        </a:spcBef>
+                        <a:spcAft>
+                          <a:spcPts val="0"/>
+                        </a:spcAft>
+                        <a:buClrTx/>
+                        <a:buSzTx/>
+                        <a:buFontTx/>
+                        <a:buNone/>
+                        <a:tabLst/>
+                        <a:defRPr/>
+                      </a:pPr>
+                      <a:r>
+                        <a:rPr lang="en-US" sz="1400">
+                          <a:highlight>
+                            <a:srgbClr val="FFFF00"/>
+                          </a:highlight>
+                          <a:latin typeface="Perpetua"/>
+                          <a:ea typeface="Calibri"/>
+                          <a:cs typeface="Calibri"/>
+                        </a:rPr>
+                        <a:t>###</a:t>
+                      </a:r>
+                      <a:r>
+                        <a:rPr lang="en-US" sz="1400">
+                          <a:latin typeface="Perpetua"/>
+                          <a:ea typeface="Calibri"/>
+                          <a:cs typeface="Calibri"/>
+                        </a:rPr>
+                        <a:t> </a:t>
+                      </a:r>
+                      <a:r>
+                        <a:rPr lang="en-US" sz="1400">
+                          <a:solidFill>
+                            <a:schemeClr val="tx1"/>
+                          </a:solidFill>
+                          <a:latin typeface="Perpetua"/>
+                          <a:ea typeface="Calibri"/>
+                          <a:cs typeface="Calibri"/>
+                        </a:rPr>
+                        <a:t>p</a:t>
+                      </a:r>
+                      <a:r>
+                        <a:rPr lang="en-US" sz="1400">
+                          <a:solidFill>
+                            <a:schemeClr val="tx1"/>
+                          </a:solidFill>
+                          <a:latin typeface="Perpetua"/>
+                        </a:rPr>
+                        <a:t>pm</a:t>
+                      </a:r>
+                    </a:p>
+                  </a:txBody>
+                  <a:tcPr>
+                    <a:lnL w="3175">
+                      <a:solidFill>
+                        <a:schemeClr val="tx1"/>
+                      </a:solidFill>
+                    </a:lnL>
+                    <a:lnR w="3175">
+                      <a:solidFill>
+                        <a:schemeClr val="tx1"/>
+                      </a:solidFill>
+                    </a:lnR>
+                    <a:lnT w="3175" cap="flat" cmpd="sng" algn="ctr">
+                      <a:solidFill>
+                        <a:schemeClr val="tx1"/>
+                      </a:solidFill>
+                      <a:prstDash val="solid"/>
+                      <a:round/>
+                      <a:headEnd type="none" w="med" len="med"/>
+                      <a:tailEnd type="none" w="med" len="med"/>
+                    </a:lnT>
+                    <a:lnB w="3175">
+                      <a:solidFill>
+                        <a:schemeClr val="tx1"/>
+                      </a:solidFill>
+                    </a:lnB>
+                    <a:noFill/>
+                  </a:tcPr>
+                </a:tc>
+                <a:extLst>
+                  <a:ext uri="{0D108BD9-81ED-4DB2-BD59-A6C34878D82A}">
+                    <a16:rowId xmlns:a16="http://schemas.microsoft.com/office/drawing/2014/main" val="2121768640"/>
+                  </a:ext>
+                </a:extLst>
+              </a:tr>
+            </a:tbl>
+          </a:graphicData>
+        </a:graphic>
+      </p:graphicFrame>
+      <p:sp>
+        <p:nvSpPr>
+          <p:cNvPr id="3" name="Slide Number Placeholder 2">
             <a:extLst>
               <a:ext uri="{FF2B5EF4-FFF2-40B4-BE49-F238E27FC236}">
-                <a16:creationId xmlns:a16="http://schemas.microsoft.com/office/drawing/2014/main" id="{01EAB2B3-F4CD-A12D-6FFC-1CC319E4A3F1}"/>
-              </a:ext>
-            </a:extLst>
-          </p:cNvPr>
-          <p:cNvPicPr>
-            <a:picLocks noGrp="1" noChangeAspect="1"/>
-          </p:cNvPicPr>
-          <p:nvPr>
-            <p:ph idx="1"/>
-          </p:nvPr>
-        </p:nvPicPr>
-        <p:blipFill>
-          <a:blip r:embed="rId2"/>
-          <a:stretch>
-            <a:fillRect/>
-          </a:stretch>
-        </p:blipFill>
-        <p:spPr>
-          <a:xfrm>
-            <a:off x="-120883" y="-156437"/>
-            <a:ext cx="8014165" cy="10371274"/>
-          </a:xfrm>
-          <a:prstGeom prst="rect">
-            <a:avLst/>
-          </a:prstGeom>
-        </p:spPr>
-      </p:pic>
-    </p:spTree>
-    <p:extLst>
-      <p:ext uri="{BB962C8B-B14F-4D97-AF65-F5344CB8AC3E}">
-        <p14:creationId xmlns:p14="http://schemas.microsoft.com/office/powerpoint/2010/main" val="1451196428"/>
-      </p:ext>
-    </p:extLst>
-  </p:cSld>
-  <p:clrMapOvr>
-    <a:masterClrMapping/>
-  </p:clrMapOvr>
-</p:sld>
-</file>
-
-<file path=ppt/slides/slide6.xml><?xml version="1.0" encoding="utf-8"?>
-<p:sld xmlns:a="http://schemas.openxmlformats.org/drawingml/2006/main" xmlns:r="http://schemas.openxmlformats.org/officeDocument/2006/relationships" xmlns:p="http://schemas.openxmlformats.org/presentationml/2006/main">
-  <p:cSld>
-    <p:spTree>
-      <p:nvGrpSpPr>
-        <p:cNvPr id="1" name=""/>
-        <p:cNvGrpSpPr/>
-        <p:nvPr/>
-      </p:nvGrpSpPr>
-      <p:grpSpPr>
-        <a:xfrm>
-          <a:off x="0" y="0"/>
-          <a:ext cx="0" cy="0"/>
-          <a:chOff x="0" y="0"/>
-          <a:chExt cx="0" cy="0"/>
-        </a:xfrm>
-      </p:grpSpPr>
-      <p:pic>
-        <p:nvPicPr>
-          <p:cNvPr id="7" name="Content Placeholder 6">
-            <a:extLst>
-              <a:ext uri="{FF2B5EF4-FFF2-40B4-BE49-F238E27FC236}">
-                <a16:creationId xmlns:a16="http://schemas.microsoft.com/office/drawing/2014/main" id="{6003DDD5-4C6F-AC0D-7143-02E99F160A42}"/>
-              </a:ext>
-            </a:extLst>
-          </p:cNvPr>
-          <p:cNvPicPr>
-            <a:picLocks noGrp="1" noChangeAspect="1"/>
-          </p:cNvPicPr>
-          <p:nvPr>
-            <p:ph idx="1"/>
-          </p:nvPr>
-        </p:nvPicPr>
-        <p:blipFill>
-          <a:blip r:embed="rId2"/>
-          <a:stretch>
-            <a:fillRect/>
-          </a:stretch>
-        </p:blipFill>
-        <p:spPr>
-          <a:xfrm>
-            <a:off x="-162560" y="-169134"/>
-            <a:ext cx="8100583" cy="10483107"/>
-          </a:xfrm>
-          <a:prstGeom prst="rect">
-            <a:avLst/>
-          </a:prstGeom>
-        </p:spPr>
-      </p:pic>
-    </p:spTree>
-    <p:extLst>
-      <p:ext uri="{BB962C8B-B14F-4D97-AF65-F5344CB8AC3E}">
-        <p14:creationId xmlns:p14="http://schemas.microsoft.com/office/powerpoint/2010/main" val="4171395029"/>
-      </p:ext>
-    </p:extLst>
-  </p:cSld>
-  <p:clrMapOvr>
-    <a:masterClrMapping/>
-  </p:clrMapOvr>
-</p:sld>
-</file>
-
-<file path=ppt/slides/slide7.xml><?xml version="1.0" encoding="utf-8"?>
-<p:sld xmlns:a="http://schemas.openxmlformats.org/drawingml/2006/main" xmlns:r="http://schemas.openxmlformats.org/officeDocument/2006/relationships" xmlns:p="http://schemas.openxmlformats.org/presentationml/2006/main" show="0">
-  <p:cSld>
-    <p:spTree>
-      <p:nvGrpSpPr>
-        <p:cNvPr id="1" name="">
-          <a:extLst>
-            <a:ext uri="{FF2B5EF4-FFF2-40B4-BE49-F238E27FC236}">
-              <a16:creationId xmlns:a16="http://schemas.microsoft.com/office/drawing/2014/main" id="{2E98587B-A6FD-12D1-B4A5-073BE2A4AF29}"/>
-            </a:ext>
-          </a:extLst>
-        </p:cNvPr>
-        <p:cNvGrpSpPr/>
-        <p:nvPr/>
-      </p:nvGrpSpPr>
-      <p:grpSpPr>
-        <a:xfrm>
-          <a:off x="0" y="0"/>
-          <a:ext cx="0" cy="0"/>
-          <a:chOff x="0" y="0"/>
-          <a:chExt cx="0" cy="0"/>
-        </a:xfrm>
-      </p:grpSpPr>
-      <p:sp>
-        <p:nvSpPr>
-          <p:cNvPr id="3" name="Content Placeholder 2">
-            <a:extLst>
-              <a:ext uri="{FF2B5EF4-FFF2-40B4-BE49-F238E27FC236}">
-                <a16:creationId xmlns:a16="http://schemas.microsoft.com/office/drawing/2014/main" id="{A0420018-FC6D-C064-4E26-D1728F11EDD6}"/>
-              </a:ext>
-            </a:extLst>
-          </p:cNvPr>
-          <p:cNvSpPr>
-            <a:spLocks noGrp="1"/>
-          </p:cNvSpPr>
-          <p:nvPr>
-            <p:ph idx="1"/>
-          </p:nvPr>
-        </p:nvSpPr>
-        <p:spPr>
-          <a:xfrm>
-            <a:off x="590189" y="1920210"/>
-            <a:ext cx="6603191" cy="7139336"/>
-          </a:xfrm>
-        </p:spPr>
-        <p:txBody>
-          <a:bodyPr vert="horz" lIns="91440" tIns="45720" rIns="91440" bIns="45720" rtlCol="0" anchor="t">
-            <a:normAutofit fontScale="92500" lnSpcReduction="20000"/>
-          </a:bodyPr>
-          <a:lstStyle/>
-          <a:p>
-            <a:pPr marL="457200" indent="-457200" algn="just">
-              <a:buNone/>
-            </a:pPr>
-            <a:r>
-              <a:rPr lang="en-US" sz="1500" b="1" u="sng">
-                <a:latin typeface="Perpetua" panose="02020502060401020303" pitchFamily="18" charset="0"/>
-                <a:ea typeface="Calibri"/>
-                <a:cs typeface="Calibri"/>
-              </a:rPr>
-              <a:t>Text</a:t>
-            </a:r>
-          </a:p>
-          <a:p>
-            <a:pPr marL="457200" indent="-457200" algn="just">
-              <a:buNone/>
-            </a:pPr>
-            <a:r>
-              <a:rPr lang="en-US" sz="1500">
-                <a:latin typeface="Perpetua"/>
-                <a:ea typeface="Calibri"/>
-                <a:cs typeface="Calibri"/>
-              </a:rPr>
-              <a:t>1.Erie County Lead Soil Fact Sheet. (2018, January). </a:t>
-            </a:r>
-            <a:r>
-              <a:rPr lang="en-US" sz="1500" err="1">
-                <a:latin typeface="Perpetua"/>
-                <a:ea typeface="Calibri"/>
-                <a:cs typeface="Calibri"/>
-              </a:rPr>
-              <a:t>Erie.Gov</a:t>
-            </a:r>
-            <a:r>
-              <a:rPr lang="en-US" sz="1500">
-                <a:latin typeface="Perpetua"/>
-                <a:ea typeface="Calibri"/>
-                <a:cs typeface="Calibri"/>
-              </a:rPr>
-              <a:t>. https://www3.erie.gov/envhealth/sites/www3.erie.gov.envhealth/files/2022-10/leadsoilfactsheet.pdf</a:t>
-            </a:r>
-            <a:endParaRPr lang="en-US" sz="1500">
-              <a:latin typeface="Perpetua"/>
-            </a:endParaRPr>
-          </a:p>
-          <a:p>
-            <a:pPr marL="457200" indent="-457200">
-              <a:buNone/>
-            </a:pPr>
-            <a:r>
-              <a:rPr lang="en-US" sz="1500">
-                <a:latin typeface="Perpetua"/>
-                <a:ea typeface="Calibri"/>
-                <a:cs typeface="Calibri"/>
-              </a:rPr>
-              <a:t>2. </a:t>
-            </a:r>
-            <a:r>
-              <a:rPr lang="en-US" sz="1500" i="1">
-                <a:latin typeface="Perpetua"/>
-              </a:rPr>
-              <a:t>Updated Soil Lead Guidance for CERCLA sites and RCRA Corrective Action Facilities</a:t>
-            </a:r>
-            <a:r>
-              <a:rPr lang="en-US" sz="1500">
-                <a:latin typeface="Perpetua"/>
-              </a:rPr>
-              <a:t>. (2024, January). EPA. https://www.epa.gov/system/files/documents/2024-01/explainer_olem-lead-guidance_formatted.pdf</a:t>
-            </a:r>
-          </a:p>
-          <a:p>
-            <a:pPr marL="457200" indent="-457200">
-              <a:buNone/>
-            </a:pPr>
-            <a:r>
-              <a:rPr lang="en-US" sz="1500">
-                <a:latin typeface="Perpetua"/>
-                <a:ea typeface="Calibri"/>
-                <a:cs typeface="Calibri"/>
-              </a:rPr>
-              <a:t>3. </a:t>
-            </a:r>
-            <a:r>
-              <a:rPr lang="en-US" sz="1500" i="1">
-                <a:latin typeface="Perpetua"/>
-              </a:rPr>
-              <a:t>Protect Your Family from Sources of Lead</a:t>
-            </a:r>
-            <a:r>
-              <a:rPr lang="en-US" sz="1500">
-                <a:latin typeface="Perpetua"/>
-              </a:rPr>
-              <a:t>. (2025, November 17). EPA. https://www.epa.gov/lead/protect-your-family-sources-lead</a:t>
-            </a:r>
-          </a:p>
-          <a:p>
-            <a:pPr marL="457200" indent="-457200">
-              <a:buNone/>
-            </a:pPr>
-            <a:r>
-              <a:rPr lang="en-US" sz="1500">
-                <a:latin typeface="Perpetua"/>
-                <a:ea typeface="Calibri"/>
-                <a:cs typeface="Calibri"/>
-              </a:rPr>
-              <a:t>4. Jenkins, E., Galbraith, J., &amp; </a:t>
-            </a:r>
-            <a:r>
-              <a:rPr lang="en-US" sz="1500" err="1">
-                <a:latin typeface="Perpetua"/>
-                <a:ea typeface="Calibri"/>
-                <a:cs typeface="Calibri"/>
-              </a:rPr>
-              <a:t>Paltseva</a:t>
-            </a:r>
-            <a:r>
-              <a:rPr lang="en-US" sz="1500">
-                <a:latin typeface="Perpetua"/>
-                <a:ea typeface="Calibri"/>
-                <a:cs typeface="Calibri"/>
-              </a:rPr>
-              <a:t>, A. (2024). </a:t>
-            </a:r>
-            <a:r>
-              <a:rPr lang="en-US" sz="1500" i="1">
-                <a:latin typeface="Perpetua"/>
-                <a:ea typeface="Calibri"/>
-                <a:cs typeface="Calibri"/>
-              </a:rPr>
-              <a:t>Portable X-Ray Fluorescence as a Tool for Urban </a:t>
-            </a:r>
-            <a:r>
-              <a:rPr lang="en-US" sz="1500" i="1" err="1">
-                <a:latin typeface="Perpetua"/>
-                <a:ea typeface="Calibri"/>
-                <a:cs typeface="Calibri"/>
-              </a:rPr>
-              <a:t>SoilContamination</a:t>
-            </a:r>
-            <a:r>
-              <a:rPr lang="en-US" sz="1500" i="1">
-                <a:latin typeface="Perpetua"/>
-                <a:ea typeface="Calibri"/>
-                <a:cs typeface="Calibri"/>
-              </a:rPr>
-              <a:t> Analysis: Accuracy, Precision, and Practicality</a:t>
-            </a:r>
-            <a:r>
-              <a:rPr lang="en-US" sz="1500">
-                <a:latin typeface="Perpetua"/>
-                <a:ea typeface="Calibri"/>
-                <a:cs typeface="Calibri"/>
-              </a:rPr>
-              <a:t>. </a:t>
-            </a:r>
-            <a:r>
-              <a:rPr lang="en-US" sz="1500">
-                <a:latin typeface="Perpetua"/>
-                <a:ea typeface="Calibri"/>
-                <a:cs typeface="Calibri"/>
-                <a:hlinkClick r:id="rId3"/>
-              </a:rPr>
-              <a:t>https://doi.org/10.5194/egusphere-2024-3101</a:t>
-            </a:r>
-            <a:endParaRPr lang="en-US" sz="1500">
-              <a:latin typeface="Perpetua"/>
-              <a:ea typeface="Calibri"/>
-              <a:cs typeface="Calibri"/>
-            </a:endParaRPr>
-          </a:p>
-          <a:p>
-            <a:pPr marL="457200" indent="-457200">
-              <a:buNone/>
-            </a:pPr>
-            <a:r>
-              <a:rPr lang="en-US" sz="1500">
-                <a:latin typeface="Perpetua"/>
-                <a:ea typeface="Calibri"/>
-                <a:cs typeface="Calibri"/>
-              </a:rPr>
-              <a:t>5. </a:t>
-            </a:r>
-            <a:r>
-              <a:rPr lang="en-US" sz="1500">
-                <a:latin typeface="Perpetua"/>
-              </a:rPr>
-              <a:t>Ban of Lead-Containing Paint and Certain Consumer Products Bearing Lead-Containing Paint, 16 Code of Federal Regulations § 1303 (1978). https://www.ecfr.gov/current/title-16/chapter-II/subchapter-B/part-1303</a:t>
-            </a:r>
-          </a:p>
-          <a:p>
-            <a:pPr marL="457200" indent="-457200">
-              <a:buNone/>
-            </a:pPr>
-            <a:r>
-              <a:rPr lang="en-US" sz="1500">
-                <a:latin typeface="Perpetua"/>
-                <a:ea typeface="Calibri"/>
-                <a:cs typeface="Calibri"/>
-              </a:rPr>
-              <a:t>6. </a:t>
-            </a:r>
-            <a:r>
-              <a:rPr lang="en-US" sz="1500" i="1">
-                <a:latin typeface="Perpetua"/>
-              </a:rPr>
-              <a:t>Actions to Reduce Potential Lead Exposure</a:t>
-            </a:r>
-            <a:r>
-              <a:rPr lang="en-US" sz="1500">
-                <a:latin typeface="Perpetua"/>
-              </a:rPr>
-              <a:t>. (n.d.). EPA. https://www.epa.gov/lead/actions-reduce-potential-lead-exposure</a:t>
-            </a:r>
-          </a:p>
-          <a:p>
-            <a:pPr marL="457200" indent="-457200">
-              <a:buNone/>
-            </a:pPr>
-            <a:endParaRPr lang="en-US" sz="1400" b="1" u="sng">
-              <a:latin typeface="Perpetua"/>
-              <a:ea typeface="Calibri"/>
-              <a:cs typeface="Calibri"/>
-            </a:endParaRPr>
-          </a:p>
-          <a:p>
-            <a:pPr marL="457200" indent="-457200">
-              <a:buNone/>
-            </a:pPr>
-            <a:r>
-              <a:rPr lang="en-US" sz="1400" b="1" u="sng">
-                <a:latin typeface="Perpetua"/>
-                <a:ea typeface="Calibri"/>
-                <a:cs typeface="Calibri"/>
-              </a:rPr>
-              <a:t>Figures</a:t>
-            </a:r>
-            <a:endParaRPr lang="en-US"/>
-          </a:p>
-          <a:p>
-            <a:pPr marL="457200" indent="-457200">
-              <a:buAutoNum type="arabicPeriod"/>
-            </a:pPr>
-            <a:br>
-              <a:rPr lang="en-US" sz="1400" b="1">
-                <a:latin typeface="Perpetua"/>
-                <a:ea typeface="Calibri"/>
-                <a:cs typeface="Calibri"/>
-              </a:rPr>
-            </a:br>
-            <a:endParaRPr lang="en-US" sz="1400" b="1">
-              <a:latin typeface="Perpetua"/>
-              <a:ea typeface="Calibri"/>
-              <a:cs typeface="Calibri"/>
-            </a:endParaRPr>
-          </a:p>
-          <a:p>
-            <a:pPr marL="457200" indent="-457200">
-              <a:buAutoNum type="arabicPeriod"/>
-            </a:pPr>
-            <a:br>
-              <a:rPr lang="en-US" sz="1400" b="1">
-                <a:latin typeface="Perpetua"/>
-                <a:ea typeface="Calibri"/>
-                <a:cs typeface="Calibri"/>
-              </a:rPr>
-            </a:br>
-            <a:endParaRPr lang="en-US" sz="1400" b="1">
-              <a:latin typeface="Perpetua"/>
-              <a:ea typeface="Calibri"/>
-              <a:cs typeface="Calibri"/>
-            </a:endParaRPr>
-          </a:p>
-          <a:p>
-            <a:pPr marL="457200" indent="-457200">
-              <a:buAutoNum type="arabicPeriod"/>
-            </a:pPr>
-            <a:br>
-              <a:rPr lang="en-US" sz="1400" b="1">
-                <a:latin typeface="Perpetua"/>
-                <a:ea typeface="Calibri"/>
-                <a:cs typeface="Calibri"/>
-              </a:rPr>
-            </a:br>
-            <a:endParaRPr lang="en-US" sz="1400" b="1">
-              <a:latin typeface="Perpetua"/>
-              <a:ea typeface="Calibri"/>
-              <a:cs typeface="Calibri"/>
-            </a:endParaRPr>
-          </a:p>
-          <a:p>
-            <a:pPr marL="457200" indent="-457200">
-              <a:buAutoNum type="arabicPeriod"/>
-            </a:pPr>
-            <a:r>
-              <a:rPr lang="en-US" sz="1200" err="1"/>
-              <a:t>Gasdia</a:t>
-            </a:r>
-            <a:r>
-              <a:rPr lang="en-US" sz="1200"/>
-              <a:t>-Cochrane, M. (2024, February 21). Technology Focus: X-ray Fluorescence (XRF) in Mining. Techno Fisher Scientific. https://www.thermofisher.com/blog/mining/technology-focus-x-ray-fluorescence-xrf-in-mining/ </a:t>
-            </a:r>
-            <a:endParaRPr lang="en-US" sz="1200" b="1">
-              <a:latin typeface="Perpetua"/>
-              <a:ea typeface="Calibri"/>
-              <a:cs typeface="Calibri"/>
-            </a:endParaRPr>
-          </a:p>
-          <a:p>
-            <a:pPr marL="457200" indent="-457200">
-              <a:buAutoNum type="arabicPeriod"/>
-            </a:pPr>
-            <a:r>
-              <a:rPr lang="en-US" sz="1400">
-                <a:latin typeface="Perpetua"/>
-                <a:ea typeface="Calibri"/>
-                <a:cs typeface="Calibri"/>
-              </a:rPr>
-              <a:t>USEPA, Protect Your Family from Sources of Lead</a:t>
-            </a:r>
-            <a:endParaRPr lang="en-US" sz="1400">
-              <a:latin typeface="Perpetua"/>
-              <a:ea typeface="Calibri" panose="020F0502020204030204" pitchFamily="34" charset="0"/>
-              <a:cs typeface="Calibri" panose="020F0502020204030204" pitchFamily="34" charset="0"/>
-            </a:endParaRPr>
-          </a:p>
-          <a:p>
-            <a:pPr marL="457200" indent="-457200">
-              <a:buAutoNum type="arabicPeriod"/>
-            </a:pPr>
-            <a:r>
-              <a:rPr lang="en-US" sz="1400" i="1">
-                <a:latin typeface="Perpetua"/>
-                <a:ea typeface="Calibri"/>
-                <a:cs typeface="Calibri"/>
-              </a:rPr>
-              <a:t>Actions to Reduce Potential Lead Exposure</a:t>
-            </a:r>
-            <a:r>
-              <a:rPr lang="en-US" sz="1400">
-                <a:latin typeface="Perpetua"/>
-                <a:ea typeface="Calibri"/>
-                <a:cs typeface="Calibri"/>
-              </a:rPr>
-              <a:t>. (n.d.). EPA. </a:t>
-            </a:r>
-            <a:r>
-              <a:rPr lang="en-US" sz="1400">
-                <a:latin typeface="Perpetua"/>
-                <a:ea typeface="Calibri"/>
-                <a:cs typeface="Calibri"/>
-                <a:hlinkClick r:id="rId4"/>
-              </a:rPr>
-              <a:t>https://www.epa.gov/lead/actions-reduce-potential-lead-exposure</a:t>
-            </a:r>
-          </a:p>
-          <a:p>
-            <a:pPr marL="457200" indent="-457200">
-              <a:buAutoNum type="arabicPeriod"/>
-            </a:pPr>
-            <a:endParaRPr lang="en-US" sz="1400">
-              <a:latin typeface="Perpetua"/>
-              <a:ea typeface="Calibri" panose="020F0502020204030204" pitchFamily="34" charset="0"/>
-              <a:cs typeface="Calibri" panose="020F0502020204030204" pitchFamily="34" charset="0"/>
-            </a:endParaRPr>
-          </a:p>
-          <a:p>
-            <a:pPr marL="0" indent="0">
-              <a:buNone/>
-            </a:pPr>
-            <a:r>
-              <a:rPr lang="en-US" sz="1400">
-                <a:latin typeface="Perpetua"/>
-                <a:ea typeface="Calibri"/>
-                <a:cs typeface="Calibri"/>
-              </a:rPr>
-              <a:t>QR link: </a:t>
-            </a:r>
-            <a:r>
-              <a:rPr lang="en-US" sz="1100">
-                <a:latin typeface="Aptos"/>
-                <a:ea typeface="Calibri"/>
-                <a:cs typeface="Calibri"/>
-              </a:rPr>
-              <a:t>https://bit.ly/3LbnnqZ </a:t>
-            </a:r>
-            <a:endParaRPr lang="en-US" sz="1400">
-              <a:latin typeface="Perpetua"/>
-              <a:ea typeface="Calibri" panose="020F0502020204030204" pitchFamily="34" charset="0"/>
-              <a:cs typeface="Calibri" panose="020F0502020204030204" pitchFamily="34" charset="0"/>
-            </a:endParaRPr>
-          </a:p>
-          <a:p>
-            <a:pPr marL="457200" indent="-457200">
-              <a:buAutoNum type="arabicPeriod"/>
-            </a:pPr>
-            <a:endParaRPr lang="en-US" sz="1400">
-              <a:latin typeface="Perpetua"/>
-              <a:ea typeface="Calibri" panose="020F0502020204030204" pitchFamily="34" charset="0"/>
-              <a:cs typeface="Calibri" panose="020F0502020204030204" pitchFamily="34" charset="0"/>
-            </a:endParaRPr>
-          </a:p>
-          <a:p>
-            <a:pPr marL="457200" indent="-457200">
-              <a:buNone/>
-            </a:pPr>
-            <a:endParaRPr lang="en-US" sz="1400">
-              <a:latin typeface="Perpetua"/>
-              <a:ea typeface="Calibri" panose="020F0502020204030204" pitchFamily="34" charset="0"/>
-              <a:cs typeface="Calibri" panose="020F0502020204030204" pitchFamily="34" charset="0"/>
-            </a:endParaRPr>
-          </a:p>
-        </p:txBody>
-      </p:sp>
-      <p:sp>
-        <p:nvSpPr>
-          <p:cNvPr id="9" name="Date Placeholder 8">
-            <a:extLst>
-              <a:ext uri="{FF2B5EF4-FFF2-40B4-BE49-F238E27FC236}">
-                <a16:creationId xmlns:a16="http://schemas.microsoft.com/office/drawing/2014/main" id="{ACBFE3EA-98AA-7EB1-9B0F-8EAFE1391164}"/>
-              </a:ext>
-            </a:extLst>
-          </p:cNvPr>
-          <p:cNvSpPr>
-            <a:spLocks noGrp="1"/>
-          </p:cNvSpPr>
-          <p:nvPr>
-            <p:ph type="dt" sz="half" idx="10"/>
-          </p:nvPr>
-        </p:nvSpPr>
-        <p:spPr/>
-        <p:txBody>
-          <a:bodyPr/>
-          <a:lstStyle/>
-          <a:p>
-            <a:fld id="{E77CD51D-C0C4-45A4-9453-5DF12ADBCCF4}" type="datetime1">
-              <a:rPr lang="en-US" smtClean="0"/>
-              <a:t>4/8/2026</a:t>
-            </a:fld>
-            <a:endParaRPr lang="en-US"/>
-          </a:p>
-        </p:txBody>
-      </p:sp>
-      <p:sp>
-        <p:nvSpPr>
-          <p:cNvPr id="10" name="Slide Number Placeholder 9">
-            <a:extLst>
-              <a:ext uri="{FF2B5EF4-FFF2-40B4-BE49-F238E27FC236}">
-                <a16:creationId xmlns:a16="http://schemas.microsoft.com/office/drawing/2014/main" id="{1C7E2479-44AE-306A-75D4-893931BB03D3}"/>
+                <a16:creationId xmlns:a16="http://schemas.microsoft.com/office/drawing/2014/main" id="{DCA8B1F8-C3F5-21C4-E4DB-B63266800C8E}"/>
               </a:ext>
             </a:extLst>
           </p:cNvPr>
@@ -8125,7 +8036,7 @@
           <a:p>
             <a:fld id="{AF85498A-A7D2-4202-8B58-6C83C98E0B39}" type="slidenum">
               <a:rPr lang="en-US" smtClean="0"/>
-              <a:t>7</a:t>
+              <a:t>4</a:t>
             </a:fld>
             <a:endParaRPr lang="en-US"/>
           </a:p>
@@ -8133,166 +8044,157 @@
       </p:sp>
       <p:sp>
         <p:nvSpPr>
-          <p:cNvPr id="7" name="Title 1">
+          <p:cNvPr id="4" name="TextBox 21">
             <a:extLst>
               <a:ext uri="{FF2B5EF4-FFF2-40B4-BE49-F238E27FC236}">
-                <a16:creationId xmlns:a16="http://schemas.microsoft.com/office/drawing/2014/main" id="{AE05BCAE-1477-8320-2562-B4F86A0FE1BC}"/>
+                <a16:creationId xmlns:a16="http://schemas.microsoft.com/office/drawing/2014/main" id="{056F663B-753D-BEC7-0BCB-1FC80978CD75}"/>
               </a:ext>
             </a:extLst>
           </p:cNvPr>
-          <p:cNvSpPr>
-            <a:spLocks noGrp="1"/>
-          </p:cNvSpPr>
-          <p:nvPr>
-            <p:ph type="title"/>
-          </p:nvPr>
+          <p:cNvSpPr txBox="1"/>
+          <p:nvPr/>
         </p:nvSpPr>
         <p:spPr>
           <a:xfrm>
-            <a:off x="1748685" y="1038520"/>
-            <a:ext cx="4744642" cy="370135"/>
+            <a:off x="2150622" y="4358886"/>
+            <a:ext cx="2863127" cy="757130"/>
           </a:xfrm>
-        </p:spPr>
-        <p:txBody>
-          <a:bodyPr>
-            <a:normAutofit fontScale="90000"/>
-          </a:bodyPr>
-          <a:lstStyle/>
-          <a:p>
-            <a:r>
-              <a:rPr lang="en-US" sz="2400" b="1">
-                <a:latin typeface="Perpetua"/>
-                <a:cs typeface="Arial"/>
-              </a:rPr>
-              <a:t>Exposure Reduction</a:t>
-            </a:r>
-            <a:endParaRPr lang="en-US" sz="2400">
-              <a:latin typeface="Perpetua"/>
-              <a:cs typeface="Arial"/>
-            </a:endParaRPr>
-          </a:p>
-        </p:txBody>
-      </p:sp>
-      <p:pic>
-        <p:nvPicPr>
-          <p:cNvPr id="4" name="Picture 3" descr="A logo with a city skyline in the background&#10;&#10;AI-generated content may be incorrect.">
-            <a:extLst>
-              <a:ext uri="{FF2B5EF4-FFF2-40B4-BE49-F238E27FC236}">
-                <a16:creationId xmlns:a16="http://schemas.microsoft.com/office/drawing/2014/main" id="{A37AEDB3-A842-ED7C-1869-45B43188BA51}"/>
-              </a:ext>
-            </a:extLst>
-          </p:cNvPr>
-          <p:cNvPicPr>
-            <a:picLocks noChangeAspect="1" noChangeArrowheads="1"/>
-          </p:cNvPicPr>
-          <p:nvPr/>
-        </p:nvPicPr>
-        <p:blipFill>
-          <a:blip r:embed="rId5">
-            <a:extLst>
-              <a:ext uri="{28A0092B-C50C-407E-A947-70E740481C1C}">
-                <a14:useLocalDpi xmlns:a14="http://schemas.microsoft.com/office/drawing/2010/main" val="0"/>
-              </a:ext>
-            </a:extLst>
-          </a:blip>
-          <a:srcRect l="20468" t="20212" r="20128" b="20314"/>
-          <a:stretch>
-            <a:fillRect/>
-          </a:stretch>
-        </p:blipFill>
-        <p:spPr bwMode="auto">
-          <a:xfrm>
-            <a:off x="619898" y="772427"/>
-            <a:ext cx="953051" cy="958938"/>
-          </a:xfrm>
-          <a:prstGeom prst="flowChartConnector">
+          <a:prstGeom prst="rect">
             <a:avLst/>
           </a:prstGeom>
           <a:noFill/>
-          <a:ln>
-            <a:noFill/>
-          </a:ln>
-          <a:effectLst/>
-          <a:extLst>
-            <a:ext uri="{909E8E84-426E-40DD-AFC4-6F175D3DCCD1}">
-              <a14:hiddenFill xmlns:a14="http://schemas.microsoft.com/office/drawing/2010/main">
+        </p:spPr>
+        <p:txBody>
+          <a:bodyPr rot="0" spcFirstLastPara="0" vert="horz" wrap="square" lIns="91440" tIns="45720" rIns="91440" bIns="45720" numCol="1" spcCol="0" rtlCol="0" fromWordArt="0" anchor="t" anchorCtr="0" forceAA="0" compatLnSpc="1">
+            <a:prstTxWarp prst="textNoShape">
+              <a:avLst/>
+            </a:prstTxWarp>
+            <a:spAutoFit/>
+          </a:bodyPr>
+          <a:lstStyle>
+            <a:defPPr>
+              <a:defRPr lang="en-US"/>
+            </a:defPPr>
+            <a:lvl1pPr marL="0" algn="l" defTabSz="457200" rtl="0" eaLnBrk="1" latinLnBrk="0" hangingPunct="1">
+              <a:defRPr sz="1800" kern="1200">
                 <a:solidFill>
-                  <a:srgbClr val="04617B"/>
+                  <a:schemeClr val="tx1"/>
                 </a:solidFill>
-              </a14:hiddenFill>
-            </a:ext>
-            <a:ext uri="{91240B29-F687-4F45-9708-019B960494DF}">
-              <a14:hiddenLine xmlns:a14="http://schemas.microsoft.com/office/drawing/2010/main" w="25400" algn="ctr">
+                <a:latin typeface="+mn-lt"/>
+                <a:ea typeface="+mn-ea"/>
+                <a:cs typeface="+mn-cs"/>
+              </a:defRPr>
+            </a:lvl1pPr>
+            <a:lvl2pPr marL="457200" algn="l" defTabSz="457200" rtl="0" eaLnBrk="1" latinLnBrk="0" hangingPunct="1">
+              <a:defRPr sz="1800" kern="1200">
                 <a:solidFill>
-                  <a:srgbClr val="000000"/>
+                  <a:schemeClr val="tx1"/>
                 </a:solidFill>
-                <a:round/>
-                <a:headEnd/>
-                <a:tailEnd/>
-              </a14:hiddenLine>
-            </a:ext>
-            <a:ext uri="{AF507438-7753-43E0-B8FC-AC1667EBCBE1}">
-              <a14:hiddenEffects xmlns:a14="http://schemas.microsoft.com/office/drawing/2010/main">
-                <a:effectLst>
-                  <a:outerShdw dist="35921" dir="2700000" algn="ctr" rotWithShape="0">
-                    <a:srgbClr val="000000"/>
-                  </a:outerShdw>
-                </a:effectLst>
-              </a14:hiddenEffects>
-            </a:ext>
-          </a:extLst>
-        </p:spPr>
-      </p:pic>
-      <p:cxnSp>
-        <p:nvCxnSpPr>
-          <p:cNvPr id="6" name="Straight Connector 5">
-            <a:extLst>
-              <a:ext uri="{FF2B5EF4-FFF2-40B4-BE49-F238E27FC236}">
-                <a16:creationId xmlns:a16="http://schemas.microsoft.com/office/drawing/2014/main" id="{F739CB57-C61C-D525-35B7-2C1BA5FC1068}"/>
-              </a:ext>
-            </a:extLst>
-          </p:cNvPr>
-          <p:cNvCxnSpPr>
-            <a:cxnSpLocks/>
-          </p:cNvCxnSpPr>
-          <p:nvPr/>
-        </p:nvCxnSpPr>
-        <p:spPr>
-          <a:xfrm>
-            <a:off x="1752805" y="1403281"/>
-            <a:ext cx="5400482" cy="21086"/>
-          </a:xfrm>
-          <a:prstGeom prst="line">
-            <a:avLst/>
-          </a:prstGeom>
-          <a:ln w="57150">
-            <a:solidFill>
-              <a:schemeClr val="tx2">
-                <a:lumMod val="75000"/>
-                <a:lumOff val="25000"/>
-              </a:schemeClr>
-            </a:solidFill>
-          </a:ln>
-        </p:spPr>
-        <p:style>
-          <a:lnRef idx="2">
-            <a:schemeClr val="accent1"/>
-          </a:lnRef>
-          <a:fillRef idx="0">
-            <a:schemeClr val="accent1"/>
-          </a:fillRef>
-          <a:effectRef idx="1">
-            <a:schemeClr val="accent1"/>
-          </a:effectRef>
-          <a:fontRef idx="minor">
-            <a:schemeClr val="tx1"/>
-          </a:fontRef>
-        </p:style>
-      </p:cxnSp>
+                <a:latin typeface="+mn-lt"/>
+                <a:ea typeface="+mn-ea"/>
+                <a:cs typeface="+mn-cs"/>
+              </a:defRPr>
+            </a:lvl2pPr>
+            <a:lvl3pPr marL="914400" algn="l" defTabSz="457200" rtl="0" eaLnBrk="1" latinLnBrk="0" hangingPunct="1">
+              <a:defRPr sz="1800" kern="1200">
+                <a:solidFill>
+                  <a:schemeClr val="tx1"/>
+                </a:solidFill>
+                <a:latin typeface="+mn-lt"/>
+                <a:ea typeface="+mn-ea"/>
+                <a:cs typeface="+mn-cs"/>
+              </a:defRPr>
+            </a:lvl3pPr>
+            <a:lvl4pPr marL="1371600" algn="l" defTabSz="457200" rtl="0" eaLnBrk="1" latinLnBrk="0" hangingPunct="1">
+              <a:defRPr sz="1800" kern="1200">
+                <a:solidFill>
+                  <a:schemeClr val="tx1"/>
+                </a:solidFill>
+                <a:latin typeface="+mn-lt"/>
+                <a:ea typeface="+mn-ea"/>
+                <a:cs typeface="+mn-cs"/>
+              </a:defRPr>
+            </a:lvl4pPr>
+            <a:lvl5pPr marL="1828800" algn="l" defTabSz="457200" rtl="0" eaLnBrk="1" latinLnBrk="0" hangingPunct="1">
+              <a:defRPr sz="1800" kern="1200">
+                <a:solidFill>
+                  <a:schemeClr val="tx1"/>
+                </a:solidFill>
+                <a:latin typeface="+mn-lt"/>
+                <a:ea typeface="+mn-ea"/>
+                <a:cs typeface="+mn-cs"/>
+              </a:defRPr>
+            </a:lvl5pPr>
+            <a:lvl6pPr marL="2286000" algn="l" defTabSz="457200" rtl="0" eaLnBrk="1" latinLnBrk="0" hangingPunct="1">
+              <a:defRPr sz="1800" kern="1200">
+                <a:solidFill>
+                  <a:schemeClr val="tx1"/>
+                </a:solidFill>
+                <a:latin typeface="+mn-lt"/>
+                <a:ea typeface="+mn-ea"/>
+                <a:cs typeface="+mn-cs"/>
+              </a:defRPr>
+            </a:lvl6pPr>
+            <a:lvl7pPr marL="2743200" algn="l" defTabSz="457200" rtl="0" eaLnBrk="1" latinLnBrk="0" hangingPunct="1">
+              <a:defRPr sz="1800" kern="1200">
+                <a:solidFill>
+                  <a:schemeClr val="tx1"/>
+                </a:solidFill>
+                <a:latin typeface="+mn-lt"/>
+                <a:ea typeface="+mn-ea"/>
+                <a:cs typeface="+mn-cs"/>
+              </a:defRPr>
+            </a:lvl7pPr>
+            <a:lvl8pPr marL="3200400" algn="l" defTabSz="457200" rtl="0" eaLnBrk="1" latinLnBrk="0" hangingPunct="1">
+              <a:defRPr sz="1800" kern="1200">
+                <a:solidFill>
+                  <a:schemeClr val="tx1"/>
+                </a:solidFill>
+                <a:latin typeface="+mn-lt"/>
+                <a:ea typeface="+mn-ea"/>
+                <a:cs typeface="+mn-cs"/>
+              </a:defRPr>
+            </a:lvl8pPr>
+            <a:lvl9pPr marL="3657600" algn="l" defTabSz="457200" rtl="0" eaLnBrk="1" latinLnBrk="0" hangingPunct="1">
+              <a:defRPr sz="1800" kern="1200">
+                <a:solidFill>
+                  <a:schemeClr val="tx1"/>
+                </a:solidFill>
+                <a:latin typeface="+mn-lt"/>
+                <a:ea typeface="+mn-ea"/>
+                <a:cs typeface="+mn-cs"/>
+              </a:defRPr>
+            </a:lvl9pPr>
+          </a:lstStyle>
+          <a:p>
+            <a:pPr>
+              <a:lnSpc>
+                <a:spcPct val="90000"/>
+              </a:lnSpc>
+              <a:spcBef>
+                <a:spcPts val="850"/>
+              </a:spcBef>
+            </a:pPr>
+            <a:r>
+              <a:rPr lang="en-US" sz="1400">
+                <a:highlight>
+                  <a:srgbClr val="FFFF00"/>
+                </a:highlight>
+                <a:latin typeface="Perpetua"/>
+              </a:rPr>
+              <a:t>Heat map of property (no basemap) - make sure background is white</a:t>
+            </a:r>
+          </a:p>
+          <a:p>
+            <a:pPr algn="ctr"/>
+            <a:endParaRPr lang="en-US"/>
+          </a:p>
+        </p:txBody>
+      </p:sp>
     </p:spTree>
     <p:extLst>
       <p:ext uri="{BB962C8B-B14F-4D97-AF65-F5344CB8AC3E}">
-        <p14:creationId xmlns:p14="http://schemas.microsoft.com/office/powerpoint/2010/main" val="2852702300"/>
+        <p14:creationId xmlns:p14="http://schemas.microsoft.com/office/powerpoint/2010/main" val="2461842306"/>
       </p:ext>
     </p:extLst>
   </p:cSld>
@@ -9253,15 +9155,6 @@
 </file>
 
 <file path=customXml/item1.xml><?xml version="1.0" encoding="utf-8"?>
-<?mso-contentType ?>
-<FormTemplates xmlns="http://schemas.microsoft.com/sharepoint/v3/contenttype/forms">
-  <Display>DocumentLibraryForm</Display>
-  <Edit>DocumentLibraryForm</Edit>
-  <New>DocumentLibraryForm</New>
-</FormTemplates>
-</file>
-
-<file path=customXml/item2.xml><?xml version="1.0" encoding="utf-8"?>
 <ct:contentTypeSchema xmlns:ct="http://schemas.microsoft.com/office/2006/metadata/contentType" xmlns:ma="http://schemas.microsoft.com/office/2006/metadata/properties/metaAttributes" ct:_="" ma:_="" ma:contentTypeName="Document" ma:contentTypeID="0x010100B5C00F2116D4EA4C8DD2167EDA1D90A4" ma:contentTypeVersion="11" ma:contentTypeDescription="Create a new document." ma:contentTypeScope="" ma:versionID="a6a069d3677ceffa0fd58e5ea19d4c30">
   <xsd:schema xmlns:xsd="http://www.w3.org/2001/XMLSchema" xmlns:xs="http://www.w3.org/2001/XMLSchema" xmlns:p="http://schemas.microsoft.com/office/2006/metadata/properties" xmlns:ns2="2dfc68a2-ae10-4ffa-b3f4-abe62a45313a" xmlns:ns3="7d18843c-7584-4fd4-885f-9ebd21322727" targetNamespace="http://schemas.microsoft.com/office/2006/metadata/properties" ma:root="true" ma:fieldsID="a975bc98f7f2d6cbb2cbda3d0f261976" ns2:_="" ns3:_="">
     <xsd:import namespace="2dfc68a2-ae10-4ffa-b3f4-abe62a45313a"/>
@@ -9456,6 +9349,15 @@
 </ct:contentTypeSchema>
 </file>
 
+<file path=customXml/item2.xml><?xml version="1.0" encoding="utf-8"?>
+<?mso-contentType ?>
+<FormTemplates xmlns="http://schemas.microsoft.com/sharepoint/v3/contenttype/forms">
+  <Display>DocumentLibraryForm</Display>
+  <Edit>DocumentLibraryForm</Edit>
+  <New>DocumentLibraryForm</New>
+</FormTemplates>
+</file>
+
 <file path=customXml/item3.xml><?xml version="1.0" encoding="utf-8"?>
 <p:properties xmlns:p="http://schemas.microsoft.com/office/2006/metadata/properties" xmlns:xsi="http://www.w3.org/2001/XMLSchema-instance" xmlns:pc="http://schemas.microsoft.com/office/infopath/2007/PartnerControls">
   <documentManagement>
@@ -9468,14 +9370,6 @@
 </file>
 
 <file path=customXml/itemProps1.xml><?xml version="1.0" encoding="utf-8"?>
-<ds:datastoreItem xmlns:ds="http://schemas.openxmlformats.org/officeDocument/2006/customXml" ds:itemID="{E9B7C6BD-59CF-4295-8D57-92F0ABDE5030}">
-  <ds:schemaRefs>
-    <ds:schemaRef ds:uri="http://schemas.microsoft.com/sharepoint/v3/contenttype/forms"/>
-  </ds:schemaRefs>
-</ds:datastoreItem>
-</file>
-
-<file path=customXml/itemProps2.xml><?xml version="1.0" encoding="utf-8"?>
 <ds:datastoreItem xmlns:ds="http://schemas.openxmlformats.org/officeDocument/2006/customXml" ds:itemID="{3DF158BA-4603-4708-A290-87706703384F}">
   <ds:schemaRefs>
     <ds:schemaRef ds:uri="2dfc68a2-ae10-4ffa-b3f4-abe62a45313a"/>
@@ -9490,6 +9384,14 @@
     <ds:schemaRef ds:uri="http://schemas.microsoft.com/office/infopath/2007/PartnerControls"/>
     <ds:schemaRef ds:uri="http://schemas.openxmlformats.org/package/2006/metadata/core-properties"/>
     <ds:schemaRef ds:uri="http://www.w3.org/2001/XMLSchema"/>
+  </ds:schemaRefs>
+</ds:datastoreItem>
+</file>
+
+<file path=customXml/itemProps2.xml><?xml version="1.0" encoding="utf-8"?>
+<ds:datastoreItem xmlns:ds="http://schemas.openxmlformats.org/officeDocument/2006/customXml" ds:itemID="{E9B7C6BD-59CF-4295-8D57-92F0ABDE5030}">
+  <ds:schemaRefs>
+    <ds:schemaRef ds:uri="http://schemas.microsoft.com/sharepoint/v3/contenttype/forms"/>
   </ds:schemaRefs>
 </ds:datastoreItem>
 </file>
